--- a/presentation/03_Telco_Churn_Analysis_Presentation.pptx
+++ b/presentation/03_Telco_Churn_Analysis_Presentation.pptx
@@ -5,7 +5,7 @@
     <p:sldMasterId id="2147483648" r:id="rId1"/>
   </p:sldMasterIdLst>
   <p:notesMasterIdLst>
-    <p:notesMasterId r:id="rId12"/>
+    <p:notesMasterId r:id="rId13"/>
   </p:notesMasterIdLst>
   <p:sldIdLst>
     <p:sldId id="256" r:id="rId2"/>
@@ -16,8 +16,9 @@
     <p:sldId id="262" r:id="rId7"/>
     <p:sldId id="263" r:id="rId8"/>
     <p:sldId id="264" r:id="rId9"/>
-    <p:sldId id="265" r:id="rId10"/>
-    <p:sldId id="266" r:id="rId11"/>
+    <p:sldId id="267" r:id="rId10"/>
+    <p:sldId id="265" r:id="rId11"/>
+    <p:sldId id="266" r:id="rId12"/>
   </p:sldIdLst>
   <p:sldSz cx="12192000" cy="6858000"/>
   <p:notesSz cx="6858000" cy="9144000"/>
@@ -116,6 +117,11 @@
       </a:defRPr>
     </a:lvl9pPr>
   </p:defaultTextStyle>
+  <p:extLst>
+    <p:ext uri="{EFAFB233-063F-42B5-8137-9DF3F51BA10A}">
+      <p15:sldGuideLst xmlns:p15="http://schemas.microsoft.com/office/powerpoint/2012/main"/>
+    </p:ext>
+  </p:extLst>
 </p:presentation>
 </file>
 
@@ -10229,12 +10235,9 @@
               <a:defRPr/>
             </a:pPr>
             <a:r>
-              <a:rPr lang="en-NG" sz="1400" b="1" i="0" u="none" strike="noStrike" baseline="0">
-                <a:solidFill>
-                  <a:sysClr val="windowText" lastClr="000000">
-                    <a:lumMod val="65000"/>
-                    <a:lumOff val="35000"/>
-                  </a:sysClr>
+              <a:rPr lang="en-NG" sz="1400" b="1" i="0" u="none" strike="noStrike" baseline="0" dirty="0">
+                <a:solidFill>
+                  <a:srgbClr val="477BAB"/>
                 </a:solidFill>
                 <a:effectLst/>
                 <a:latin typeface="Aptos Narrow" panose="02110004020202020204"/>
@@ -10244,17 +10247,17 @@
               <a:t>Churn Status by Monthly Charge</a:t>
             </a:r>
             <a:r>
-              <a:rPr lang="en-NG">
+              <a:rPr lang="en-NG" dirty="0">
+                <a:solidFill>
+                  <a:srgbClr val="477BAB"/>
+                </a:solidFill>
                 <a:effectLst/>
               </a:rPr>
               <a:t> </a:t>
             </a:r>
-            <a:endParaRPr lang="en-US" sz="1400" b="0" i="0" u="none" strike="noStrike" baseline="0">
+            <a:endParaRPr lang="en-US" sz="1400" b="0" i="0" u="none" strike="noStrike" baseline="0" dirty="0">
               <a:solidFill>
-                <a:sysClr val="windowText" lastClr="000000">
-                  <a:lumMod val="65000"/>
-                  <a:lumOff val="35000"/>
-                </a:sysClr>
+                <a:srgbClr val="477BAB"/>
               </a:solidFill>
               <a:latin typeface="Aptos Narrow" panose="02110004020202020204"/>
             </a:endParaRPr>
@@ -10318,6 +10321,9 @@
           <a:p>
             <a:pPr algn="ctr" rtl="0">
               <a:defRPr b="1">
+                <a:solidFill>
+                  <a:srgbClr val="477BAB"/>
+                </a:solidFill>
                 <a:latin typeface="Arial" panose="020B0604020202020204" pitchFamily="34" charset="0"/>
                 <a:ea typeface="Arial" panose="020B0604020202020204" pitchFamily="34" charset="0"/>
                 <a:cs typeface="Arial" panose="020B0604020202020204" pitchFamily="34" charset="0"/>
@@ -10325,10 +10331,7 @@
             </a:pPr>
             <a:endParaRPr lang="en-US" sz="900" b="1" i="0" u="none" strike="noStrike" baseline="0">
               <a:solidFill>
-                <a:prstClr val="black">
-                  <a:lumMod val="65000"/>
-                  <a:lumOff val="35000"/>
-                </a:prstClr>
+                <a:srgbClr val="477BAB"/>
               </a:solidFill>
               <a:latin typeface="Arial" panose="020B0604020202020204" pitchFamily="34" charset="0"/>
               <a:cs typeface="Arial" panose="020B0604020202020204" pitchFamily="34" charset="0"/>
@@ -10350,6 +10353,9 @@
           <a:p>
             <a:pPr algn="ctr" rtl="0">
               <a:defRPr b="1">
+                <a:solidFill>
+                  <a:srgbClr val="477BAB"/>
+                </a:solidFill>
                 <a:latin typeface="Arial" panose="020B0604020202020204" pitchFamily="34" charset="0"/>
                 <a:ea typeface="Arial" panose="020B0604020202020204" pitchFamily="34" charset="0"/>
                 <a:cs typeface="Arial" panose="020B0604020202020204" pitchFamily="34" charset="0"/>
@@ -10357,10 +10363,7 @@
             </a:pPr>
             <a:endParaRPr lang="en-US" sz="900" b="1" i="0" u="none" strike="noStrike" baseline="0">
               <a:solidFill>
-                <a:prstClr val="black">
-                  <a:lumMod val="65000"/>
-                  <a:lumOff val="35000"/>
-                </a:prstClr>
+                <a:srgbClr val="477BAB"/>
               </a:solidFill>
               <a:latin typeface="Arial" panose="020B0604020202020204" pitchFamily="34" charset="0"/>
               <a:cs typeface="Arial" panose="020B0604020202020204" pitchFamily="34" charset="0"/>
@@ -11896,6 +11899,90 @@
           <a:p>
             <a:fld id="{651B0882-9D8A-4470-9195-97E64FD83013}" type="slidenum">
               <a:rPr lang="en-NG" smtClean="0"/>
+              <a:t>1</a:t>
+            </a:fld>
+            <a:endParaRPr lang="en-NG"/>
+          </a:p>
+        </p:txBody>
+      </p:sp>
+    </p:spTree>
+    <p:extLst>
+      <p:ext uri="{BB962C8B-B14F-4D97-AF65-F5344CB8AC3E}">
+        <p14:creationId xmlns:p14="http://schemas.microsoft.com/office/powerpoint/2010/main" val="1608632100"/>
+      </p:ext>
+    </p:extLst>
+  </p:cSld>
+  <p:clrMapOvr>
+    <a:masterClrMapping/>
+  </p:clrMapOvr>
+</p:notes>
+</file>
+
+<file path=ppt/notesSlides/notesSlide2.xml><?xml version="1.0" encoding="utf-8"?>
+<p:notes xmlns:a="http://schemas.openxmlformats.org/drawingml/2006/main" xmlns:r="http://schemas.openxmlformats.org/officeDocument/2006/relationships" xmlns:p="http://schemas.openxmlformats.org/presentationml/2006/main">
+  <p:cSld>
+    <p:spTree>
+      <p:nvGrpSpPr>
+        <p:cNvPr id="1" name=""/>
+        <p:cNvGrpSpPr/>
+        <p:nvPr/>
+      </p:nvGrpSpPr>
+      <p:grpSpPr>
+        <a:xfrm>
+          <a:off x="0" y="0"/>
+          <a:ext cx="0" cy="0"/>
+          <a:chOff x="0" y="0"/>
+          <a:chExt cx="0" cy="0"/>
+        </a:xfrm>
+      </p:grpSpPr>
+      <p:sp>
+        <p:nvSpPr>
+          <p:cNvPr id="2" name="Slide Image Placeholder 1"/>
+          <p:cNvSpPr>
+            <a:spLocks noGrp="1" noRot="1" noChangeAspect="1"/>
+          </p:cNvSpPr>
+          <p:nvPr>
+            <p:ph type="sldImg"/>
+          </p:nvPr>
+        </p:nvSpPr>
+        <p:spPr/>
+      </p:sp>
+      <p:sp>
+        <p:nvSpPr>
+          <p:cNvPr id="3" name="Notes Placeholder 2"/>
+          <p:cNvSpPr>
+            <a:spLocks noGrp="1"/>
+          </p:cNvSpPr>
+          <p:nvPr>
+            <p:ph type="body" idx="1"/>
+          </p:nvPr>
+        </p:nvSpPr>
+        <p:spPr/>
+        <p:txBody>
+          <a:bodyPr/>
+          <a:lstStyle/>
+          <a:p>
+            <a:endParaRPr lang="en-NG" dirty="0"/>
+          </a:p>
+        </p:txBody>
+      </p:sp>
+      <p:sp>
+        <p:nvSpPr>
+          <p:cNvPr id="4" name="Slide Number Placeholder 3"/>
+          <p:cNvSpPr>
+            <a:spLocks noGrp="1"/>
+          </p:cNvSpPr>
+          <p:nvPr>
+            <p:ph type="sldNum" sz="quarter" idx="5"/>
+          </p:nvPr>
+        </p:nvSpPr>
+        <p:spPr/>
+        <p:txBody>
+          <a:bodyPr/>
+          <a:lstStyle/>
+          <a:p>
+            <a:fld id="{651B0882-9D8A-4470-9195-97E64FD83013}" type="slidenum">
+              <a:rPr lang="en-NG" smtClean="0"/>
               <a:t>5</a:t>
             </a:fld>
             <a:endParaRPr lang="en-NG"/>
@@ -11915,7 +12002,7 @@
 </p:notes>
 </file>
 
-<file path=ppt/notesSlides/notesSlide2.xml><?xml version="1.0" encoding="utf-8"?>
+<file path=ppt/notesSlides/notesSlide3.xml><?xml version="1.0" encoding="utf-8"?>
 <p:notes xmlns:a="http://schemas.openxmlformats.org/drawingml/2006/main" xmlns:r="http://schemas.openxmlformats.org/officeDocument/2006/relationships" xmlns:p="http://schemas.openxmlformats.org/presentationml/2006/main">
   <p:cSld>
     <p:spTree>
@@ -12023,7 +12110,7 @@
 </p:notes>
 </file>
 
-<file path=ppt/notesSlides/notesSlide3.xml><?xml version="1.0" encoding="utf-8"?>
+<file path=ppt/notesSlides/notesSlide4.xml><?xml version="1.0" encoding="utf-8"?>
 <p:notes xmlns:a="http://schemas.openxmlformats.org/drawingml/2006/main" xmlns:r="http://schemas.openxmlformats.org/officeDocument/2006/relationships" xmlns:p="http://schemas.openxmlformats.org/presentationml/2006/main">
   <p:cSld>
     <p:spTree>
@@ -12131,7 +12218,7 @@
 </p:notes>
 </file>
 
-<file path=ppt/notesSlides/notesSlide4.xml><?xml version="1.0" encoding="utf-8"?>
+<file path=ppt/notesSlides/notesSlide5.xml><?xml version="1.0" encoding="utf-8"?>
 <p:notes xmlns:a="http://schemas.openxmlformats.org/drawingml/2006/main" xmlns:r="http://schemas.openxmlformats.org/officeDocument/2006/relationships" xmlns:p="http://schemas.openxmlformats.org/presentationml/2006/main">
   <p:cSld>
     <p:spTree>
@@ -12220,7 +12307,7 @@
           <a:p>
             <a:fld id="{651B0882-9D8A-4470-9195-97E64FD83013}" type="slidenum">
               <a:rPr lang="en-NG" smtClean="0"/>
-              <a:t>9</a:t>
+              <a:t>10</a:t>
             </a:fld>
             <a:endParaRPr lang="en-NG"/>
           </a:p>
@@ -12239,7 +12326,7 @@
 </p:notes>
 </file>
 
-<file path=ppt/notesSlides/notesSlide5.xml><?xml version="1.0" encoding="utf-8"?>
+<file path=ppt/notesSlides/notesSlide6.xml><?xml version="1.0" encoding="utf-8"?>
 <p:notes xmlns:a="http://schemas.openxmlformats.org/drawingml/2006/main" xmlns:r="http://schemas.openxmlformats.org/officeDocument/2006/relationships" xmlns:p="http://schemas.openxmlformats.org/presentationml/2006/main">
   <p:cSld>
     <p:spTree>
@@ -12328,7 +12415,7 @@
           <a:p>
             <a:fld id="{651B0882-9D8A-4470-9195-97E64FD83013}" type="slidenum">
               <a:rPr lang="en-NG" smtClean="0"/>
-              <a:t>10</a:t>
+              <a:t>11</a:t>
             </a:fld>
             <a:endParaRPr lang="en-NG"/>
           </a:p>
@@ -15571,9 +15658,7 @@
     <p:bg>
       <p:bgPr>
         <a:solidFill>
-          <a:srgbClr val="EAF4F4">
-            <a:alpha val="80000"/>
-          </a:srgbClr>
+          <a:srgbClr val="477BAB"/>
         </a:solidFill>
         <a:effectLst/>
       </p:bgPr>
@@ -15621,7 +15706,7 @@
             <a:r>
               <a:rPr lang="en-US" b="1" dirty="0">
                 <a:solidFill>
-                  <a:srgbClr val="477BAB"/>
+                  <a:srgbClr val="EAF4F4"/>
                 </a:solidFill>
                 <a:latin typeface="Arial" panose="020B0604020202020204" pitchFamily="34" charset="0"/>
                 <a:cs typeface="Arial" panose="020B0604020202020204" pitchFamily="34" charset="0"/>
@@ -15630,7 +15715,7 @@
             </a:r>
             <a:endParaRPr lang="en-NG" b="1" dirty="0">
               <a:solidFill>
-                <a:srgbClr val="477BAB"/>
+                <a:srgbClr val="EAF4F4"/>
               </a:solidFill>
               <a:latin typeface="Arial" panose="020B0604020202020204" pitchFamily="34" charset="0"/>
               <a:cs typeface="Arial" panose="020B0604020202020204" pitchFamily="34" charset="0"/>
@@ -15833,7 +15918,7 @@
             <a:r>
               <a:rPr lang="en-US" sz="2000" i="1" dirty="0">
                 <a:solidFill>
-                  <a:srgbClr val="477BAB"/>
+                  <a:srgbClr val="EAF4F4"/>
                 </a:solidFill>
                 <a:latin typeface="Arial" panose="020B0604020202020204" pitchFamily="34" charset="0"/>
                 <a:cs typeface="Arial" panose="020B0604020202020204" pitchFamily="34" charset="0"/>
@@ -15842,7 +15927,7 @@
             </a:r>
             <a:endParaRPr lang="en-NG" sz="2000" i="1" dirty="0">
               <a:solidFill>
-                <a:srgbClr val="477BAB"/>
+                <a:srgbClr val="EAF4F4"/>
               </a:solidFill>
               <a:latin typeface="Arial" panose="020B0604020202020204" pitchFamily="34" charset="0"/>
               <a:cs typeface="Arial" panose="020B0604020202020204" pitchFamily="34" charset="0"/>
@@ -16082,7 +16167,7 @@
             <a:r>
               <a:rPr lang="en-US" sz="2000" dirty="0">
                 <a:solidFill>
-                  <a:srgbClr val="477BAB"/>
+                  <a:srgbClr val="EAF4F4"/>
                 </a:solidFill>
                 <a:latin typeface="Arial" panose="020B0604020202020204" pitchFamily="34" charset="0"/>
                 <a:cs typeface="Arial" panose="020B0604020202020204" pitchFamily="34" charset="0"/>
@@ -16095,7 +16180,7 @@
             <a:r>
               <a:rPr lang="en-US" sz="2000" dirty="0">
                 <a:solidFill>
-                  <a:srgbClr val="477BAB"/>
+                  <a:srgbClr val="EAF4F4"/>
                 </a:solidFill>
                 <a:latin typeface="Arial" panose="020B0604020202020204" pitchFamily="34" charset="0"/>
                 <a:cs typeface="Arial" panose="020B0604020202020204" pitchFamily="34" charset="0"/>
@@ -16108,7 +16193,7 @@
             <a:r>
               <a:rPr lang="en-US" sz="2000" dirty="0">
                 <a:solidFill>
-                  <a:srgbClr val="477BAB"/>
+                  <a:srgbClr val="EAF4F4"/>
                 </a:solidFill>
                 <a:latin typeface="Arial" panose="020B0604020202020204" pitchFamily="34" charset="0"/>
                 <a:cs typeface="Arial" panose="020B0604020202020204" pitchFamily="34" charset="0"/>
@@ -16118,7 +16203,7 @@
             <a:r>
               <a:rPr lang="en-US" sz="2000" dirty="0" err="1">
                 <a:solidFill>
-                  <a:srgbClr val="477BAB"/>
+                  <a:srgbClr val="EAF4F4"/>
                 </a:solidFill>
                 <a:latin typeface="Arial" panose="020B0604020202020204" pitchFamily="34" charset="0"/>
                 <a:cs typeface="Arial" panose="020B0604020202020204" pitchFamily="34" charset="0"/>
@@ -16128,7 +16213,7 @@
             <a:r>
               <a:rPr lang="en-US" sz="2000" dirty="0">
                 <a:solidFill>
-                  <a:srgbClr val="477BAB"/>
+                  <a:srgbClr val="EAF4F4"/>
                 </a:solidFill>
                 <a:latin typeface="Arial" panose="020B0604020202020204" pitchFamily="34" charset="0"/>
                 <a:cs typeface="Arial" panose="020B0604020202020204" pitchFamily="34" charset="0"/>
@@ -16141,7 +16226,7 @@
             <a:r>
               <a:rPr lang="en-NG" sz="2000" b="1" dirty="0" err="1">
                 <a:solidFill>
-                  <a:srgbClr val="477BAB"/>
+                  <a:srgbClr val="EAF4F4"/>
                 </a:solidFill>
                 <a:latin typeface="Arial" panose="020B0604020202020204" pitchFamily="34" charset="0"/>
                 <a:cs typeface="Arial" panose="020B0604020202020204" pitchFamily="34" charset="0"/>
@@ -16151,7 +16236,7 @@
             <a:r>
               <a:rPr lang="en-NG" sz="2000" b="1" dirty="0">
                 <a:solidFill>
-                  <a:srgbClr val="477BAB"/>
+                  <a:srgbClr val="EAF4F4"/>
                 </a:solidFill>
                 <a:latin typeface="Arial" panose="020B0604020202020204" pitchFamily="34" charset="0"/>
                 <a:cs typeface="Arial" panose="020B0604020202020204" pitchFamily="34" charset="0"/>
@@ -16175,6 +16260,1154 @@
 </file>
 
 <file path=ppt/slides/slide10.xml><?xml version="1.0" encoding="utf-8"?>
+<p:sld xmlns:a="http://schemas.openxmlformats.org/drawingml/2006/main" xmlns:r="http://schemas.openxmlformats.org/officeDocument/2006/relationships" xmlns:p="http://schemas.openxmlformats.org/presentationml/2006/main">
+  <p:cSld>
+    <p:bg>
+      <p:bgPr>
+        <a:solidFill>
+          <a:srgbClr val="EAF4F4">
+            <a:alpha val="80000"/>
+          </a:srgbClr>
+        </a:solidFill>
+        <a:effectLst/>
+      </p:bgPr>
+    </p:bg>
+    <p:spTree>
+      <p:nvGrpSpPr>
+        <p:cNvPr id="1" name="">
+          <a:extLst>
+            <a:ext uri="{FF2B5EF4-FFF2-40B4-BE49-F238E27FC236}">
+              <a16:creationId xmlns:a16="http://schemas.microsoft.com/office/drawing/2014/main" id="{F7A38D55-3095-50FC-8011-0C745A6210FA}"/>
+            </a:ext>
+          </a:extLst>
+        </p:cNvPr>
+        <p:cNvGrpSpPr/>
+        <p:nvPr/>
+      </p:nvGrpSpPr>
+      <p:grpSpPr>
+        <a:xfrm>
+          <a:off x="0" y="0"/>
+          <a:ext cx="0" cy="0"/>
+          <a:chOff x="0" y="0"/>
+          <a:chExt cx="0" cy="0"/>
+        </a:xfrm>
+      </p:grpSpPr>
+      <p:sp>
+        <p:nvSpPr>
+          <p:cNvPr id="6" name="Text 1">
+            <a:extLst>
+              <a:ext uri="{FF2B5EF4-FFF2-40B4-BE49-F238E27FC236}">
+                <a16:creationId xmlns:a16="http://schemas.microsoft.com/office/drawing/2014/main" id="{2C1B3ADB-8AA4-4D80-A5B4-A3A014C08FE9}"/>
+              </a:ext>
+            </a:extLst>
+          </p:cNvPr>
+          <p:cNvSpPr/>
+          <p:nvPr/>
+        </p:nvSpPr>
+        <p:spPr>
+          <a:xfrm>
+            <a:off x="605493" y="100907"/>
+            <a:ext cx="2704768" cy="640080"/>
+          </a:xfrm>
+          <a:prstGeom prst="rect">
+            <a:avLst/>
+          </a:prstGeom>
+          <a:noFill/>
+          <a:ln/>
+        </p:spPr>
+        <p:txBody>
+          <a:bodyPr wrap="square" rtlCol="0" anchor="ctr"/>
+          <a:lstStyle/>
+          <a:p>
+            <a:pPr marL="0" indent="0">
+              <a:buNone/>
+            </a:pPr>
+            <a:r>
+              <a:rPr lang="en-US" sz="2000" b="1" dirty="0">
+                <a:solidFill>
+                  <a:srgbClr val="477BAB"/>
+                </a:solidFill>
+                <a:latin typeface="Arial" panose="020B0604020202020204" pitchFamily="34" charset="0"/>
+                <a:ea typeface="Cambria" pitchFamily="34" charset="-122"/>
+                <a:cs typeface="Arial" panose="020B0604020202020204" pitchFamily="34" charset="0"/>
+              </a:rPr>
+              <a:t>Recommendations</a:t>
+            </a:r>
+            <a:endParaRPr lang="en-US" sz="2000" b="1" dirty="0">
+              <a:solidFill>
+                <a:srgbClr val="477BAB"/>
+              </a:solidFill>
+              <a:latin typeface="Arial" panose="020B0604020202020204" pitchFamily="34" charset="0"/>
+              <a:cs typeface="Arial" panose="020B0604020202020204" pitchFamily="34" charset="0"/>
+            </a:endParaRPr>
+          </a:p>
+        </p:txBody>
+      </p:sp>
+      <p:sp>
+        <p:nvSpPr>
+          <p:cNvPr id="14" name="Shape 3">
+            <a:extLst>
+              <a:ext uri="{FF2B5EF4-FFF2-40B4-BE49-F238E27FC236}">
+                <a16:creationId xmlns:a16="http://schemas.microsoft.com/office/drawing/2014/main" id="{6B15A391-325B-D1E5-CC29-866466AA4734}"/>
+              </a:ext>
+            </a:extLst>
+          </p:cNvPr>
+          <p:cNvSpPr/>
+          <p:nvPr/>
+        </p:nvSpPr>
+        <p:spPr>
+          <a:xfrm>
+            <a:off x="491458" y="740987"/>
+            <a:ext cx="3218688" cy="3264910"/>
+          </a:xfrm>
+          <a:prstGeom prst="roundRect">
+            <a:avLst>
+              <a:gd name="adj" fmla="val 2791"/>
+            </a:avLst>
+          </a:prstGeom>
+          <a:solidFill>
+            <a:srgbClr val="477BAB"/>
+          </a:solidFill>
+          <a:ln/>
+        </p:spPr>
+        <p:txBody>
+          <a:bodyPr/>
+          <a:lstStyle/>
+          <a:p>
+            <a:endParaRPr lang="en-NG" dirty="0"/>
+          </a:p>
+        </p:txBody>
+      </p:sp>
+      <p:sp>
+        <p:nvSpPr>
+          <p:cNvPr id="17" name="Shape 3">
+            <a:extLst>
+              <a:ext uri="{FF2B5EF4-FFF2-40B4-BE49-F238E27FC236}">
+                <a16:creationId xmlns:a16="http://schemas.microsoft.com/office/drawing/2014/main" id="{4393BEEC-80FA-2A06-8381-30F3FC803968}"/>
+              </a:ext>
+            </a:extLst>
+          </p:cNvPr>
+          <p:cNvSpPr/>
+          <p:nvPr/>
+        </p:nvSpPr>
+        <p:spPr>
+          <a:xfrm>
+            <a:off x="4152703" y="740987"/>
+            <a:ext cx="3218688" cy="3264910"/>
+          </a:xfrm>
+          <a:prstGeom prst="roundRect">
+            <a:avLst>
+              <a:gd name="adj" fmla="val 2791"/>
+            </a:avLst>
+          </a:prstGeom>
+          <a:solidFill>
+            <a:srgbClr val="477BAB"/>
+          </a:solidFill>
+          <a:ln/>
+        </p:spPr>
+        <p:txBody>
+          <a:bodyPr/>
+          <a:lstStyle/>
+          <a:p>
+            <a:endParaRPr lang="en-NG" dirty="0"/>
+          </a:p>
+        </p:txBody>
+      </p:sp>
+      <p:sp>
+        <p:nvSpPr>
+          <p:cNvPr id="19" name="Shape 3">
+            <a:extLst>
+              <a:ext uri="{FF2B5EF4-FFF2-40B4-BE49-F238E27FC236}">
+                <a16:creationId xmlns:a16="http://schemas.microsoft.com/office/drawing/2014/main" id="{438F715A-534C-01D2-890D-88AC191E5B55}"/>
+              </a:ext>
+            </a:extLst>
+          </p:cNvPr>
+          <p:cNvSpPr/>
+          <p:nvPr/>
+        </p:nvSpPr>
+        <p:spPr>
+          <a:xfrm>
+            <a:off x="7645576" y="740987"/>
+            <a:ext cx="3222665" cy="3264910"/>
+          </a:xfrm>
+          <a:prstGeom prst="roundRect">
+            <a:avLst>
+              <a:gd name="adj" fmla="val 2791"/>
+            </a:avLst>
+          </a:prstGeom>
+          <a:solidFill>
+            <a:srgbClr val="477BAB"/>
+          </a:solidFill>
+          <a:ln/>
+        </p:spPr>
+        <p:txBody>
+          <a:bodyPr/>
+          <a:lstStyle/>
+          <a:p>
+            <a:endParaRPr lang="en-NG" dirty="0"/>
+          </a:p>
+        </p:txBody>
+      </p:sp>
+      <p:sp>
+        <p:nvSpPr>
+          <p:cNvPr id="25" name="Text 5">
+            <a:extLst>
+              <a:ext uri="{FF2B5EF4-FFF2-40B4-BE49-F238E27FC236}">
+                <a16:creationId xmlns:a16="http://schemas.microsoft.com/office/drawing/2014/main" id="{ECB6AEAE-EC35-AB9E-C66A-E8DD09F232AD}"/>
+              </a:ext>
+            </a:extLst>
+          </p:cNvPr>
+          <p:cNvSpPr/>
+          <p:nvPr/>
+        </p:nvSpPr>
+        <p:spPr>
+          <a:xfrm>
+            <a:off x="758429" y="1573270"/>
+            <a:ext cx="2788920" cy="2294704"/>
+          </a:xfrm>
+          <a:prstGeom prst="rect">
+            <a:avLst/>
+          </a:prstGeom>
+          <a:noFill/>
+          <a:ln/>
+        </p:spPr>
+        <p:txBody>
+          <a:bodyPr wrap="square" rtlCol="0" anchor="ctr"/>
+          <a:lstStyle/>
+          <a:p>
+            <a:r>
+              <a:rPr lang="en-NG" sz="1600" dirty="0">
+                <a:solidFill>
+                  <a:srgbClr val="EAF4F4"/>
+                </a:solidFill>
+                <a:latin typeface="Arial" panose="020B0604020202020204" pitchFamily="34" charset="0"/>
+                <a:cs typeface="Arial" panose="020B0604020202020204" pitchFamily="34" charset="0"/>
+              </a:rPr>
+              <a:t>Create targeted retention campaigns for month-to-month customers and encourage migration to one-year or two-year contracts.</a:t>
+            </a:r>
+          </a:p>
+          <a:p>
+            <a:endParaRPr lang="en-US" sz="1600" b="1" dirty="0">
+              <a:solidFill>
+                <a:srgbClr val="EAF4F4"/>
+              </a:solidFill>
+              <a:latin typeface="Arial" panose="020B0604020202020204" pitchFamily="34" charset="0"/>
+              <a:cs typeface="Arial" panose="020B0604020202020204" pitchFamily="34" charset="0"/>
+            </a:endParaRPr>
+          </a:p>
+          <a:p>
+            <a:r>
+              <a:rPr lang="en-NG" sz="1600" b="1" dirty="0">
+                <a:solidFill>
+                  <a:srgbClr val="EAF4F4"/>
+                </a:solidFill>
+                <a:latin typeface="Arial" panose="020B0604020202020204" pitchFamily="34" charset="0"/>
+                <a:cs typeface="Arial" panose="020B0604020202020204" pitchFamily="34" charset="0"/>
+              </a:rPr>
+              <a:t>Why:</a:t>
+            </a:r>
+            <a:r>
+              <a:rPr lang="en-NG" sz="1600" dirty="0">
+                <a:solidFill>
+                  <a:srgbClr val="EAF4F4"/>
+                </a:solidFill>
+                <a:latin typeface="Arial" panose="020B0604020202020204" pitchFamily="34" charset="0"/>
+                <a:cs typeface="Arial" panose="020B0604020202020204" pitchFamily="34" charset="0"/>
+              </a:rPr>
+              <a:t> Month-to-month customers have the highest churn rate by a wide margin.</a:t>
+            </a:r>
+          </a:p>
+        </p:txBody>
+      </p:sp>
+      <p:sp>
+        <p:nvSpPr>
+          <p:cNvPr id="27" name="Text 5">
+            <a:extLst>
+              <a:ext uri="{FF2B5EF4-FFF2-40B4-BE49-F238E27FC236}">
+                <a16:creationId xmlns:a16="http://schemas.microsoft.com/office/drawing/2014/main" id="{A6B00ECD-CFD2-DD57-ABD9-5BD16FF387AA}"/>
+              </a:ext>
+            </a:extLst>
+          </p:cNvPr>
+          <p:cNvSpPr/>
+          <p:nvPr/>
+        </p:nvSpPr>
+        <p:spPr>
+          <a:xfrm>
+            <a:off x="4309180" y="1711193"/>
+            <a:ext cx="2863727" cy="2004050"/>
+          </a:xfrm>
+          <a:prstGeom prst="rect">
+            <a:avLst/>
+          </a:prstGeom>
+          <a:noFill/>
+          <a:ln/>
+        </p:spPr>
+        <p:txBody>
+          <a:bodyPr wrap="square" rtlCol="0" anchor="ctr"/>
+          <a:lstStyle/>
+          <a:p>
+            <a:r>
+              <a:rPr lang="en-NG" sz="1600" dirty="0">
+                <a:solidFill>
+                  <a:srgbClr val="EAF4F4"/>
+                </a:solidFill>
+                <a:latin typeface="Arial" panose="020B0604020202020204" pitchFamily="34" charset="0"/>
+                <a:cs typeface="Arial" panose="020B0604020202020204" pitchFamily="34" charset="0"/>
+              </a:rPr>
+              <a:t>Review </a:t>
+            </a:r>
+            <a:r>
+              <a:rPr lang="en-NG" sz="1600" dirty="0" err="1">
+                <a:solidFill>
+                  <a:srgbClr val="EAF4F4"/>
+                </a:solidFill>
+                <a:latin typeface="Arial" panose="020B0604020202020204" pitchFamily="34" charset="0"/>
+                <a:cs typeface="Arial" panose="020B0604020202020204" pitchFamily="34" charset="0"/>
+              </a:rPr>
+              <a:t>fiber</a:t>
+            </a:r>
+            <a:r>
+              <a:rPr lang="en-NG" sz="1600" dirty="0">
+                <a:solidFill>
+                  <a:srgbClr val="EAF4F4"/>
+                </a:solidFill>
+                <a:latin typeface="Arial" panose="020B0604020202020204" pitchFamily="34" charset="0"/>
+                <a:cs typeface="Arial" panose="020B0604020202020204" pitchFamily="34" charset="0"/>
+              </a:rPr>
+              <a:t> customers' service quality, pricing, installation experience, complaints, and support interactions.</a:t>
+            </a:r>
+            <a:endParaRPr lang="en-US" sz="1600" dirty="0">
+              <a:solidFill>
+                <a:srgbClr val="EAF4F4"/>
+              </a:solidFill>
+              <a:latin typeface="Arial" panose="020B0604020202020204" pitchFamily="34" charset="0"/>
+              <a:cs typeface="Arial" panose="020B0604020202020204" pitchFamily="34" charset="0"/>
+            </a:endParaRPr>
+          </a:p>
+          <a:p>
+            <a:endParaRPr lang="en-NG" sz="1600" dirty="0">
+              <a:solidFill>
+                <a:srgbClr val="EAF4F4"/>
+              </a:solidFill>
+              <a:latin typeface="Arial" panose="020B0604020202020204" pitchFamily="34" charset="0"/>
+              <a:cs typeface="Arial" panose="020B0604020202020204" pitchFamily="34" charset="0"/>
+            </a:endParaRPr>
+          </a:p>
+          <a:p>
+            <a:r>
+              <a:rPr lang="en-NG" sz="1600" b="1" dirty="0">
+                <a:solidFill>
+                  <a:srgbClr val="EAF4F4"/>
+                </a:solidFill>
+                <a:latin typeface="Arial" panose="020B0604020202020204" pitchFamily="34" charset="0"/>
+                <a:cs typeface="Arial" panose="020B0604020202020204" pitchFamily="34" charset="0"/>
+              </a:rPr>
+              <a:t>Why:</a:t>
+            </a:r>
+            <a:r>
+              <a:rPr lang="en-NG" sz="1600" dirty="0">
+                <a:solidFill>
+                  <a:srgbClr val="EAF4F4"/>
+                </a:solidFill>
+                <a:latin typeface="Arial" panose="020B0604020202020204" pitchFamily="34" charset="0"/>
+                <a:cs typeface="Arial" panose="020B0604020202020204" pitchFamily="34" charset="0"/>
+              </a:rPr>
+              <a:t> Fiber-optic customers have the highest churn rate among internet-service categories.</a:t>
+            </a:r>
+          </a:p>
+        </p:txBody>
+      </p:sp>
+      <p:grpSp>
+        <p:nvGrpSpPr>
+          <p:cNvPr id="2" name="Group 1">
+            <a:extLst>
+              <a:ext uri="{FF2B5EF4-FFF2-40B4-BE49-F238E27FC236}">
+                <a16:creationId xmlns:a16="http://schemas.microsoft.com/office/drawing/2014/main" id="{01228770-5FD6-8D56-2E7F-15916650634C}"/>
+              </a:ext>
+            </a:extLst>
+          </p:cNvPr>
+          <p:cNvGrpSpPr/>
+          <p:nvPr/>
+        </p:nvGrpSpPr>
+        <p:grpSpPr>
+          <a:xfrm>
+            <a:off x="1545602" y="801241"/>
+            <a:ext cx="824550" cy="730090"/>
+            <a:chOff x="1957877" y="1646499"/>
+            <a:chExt cx="824550" cy="730090"/>
+          </a:xfrm>
+        </p:grpSpPr>
+        <p:sp>
+          <p:nvSpPr>
+            <p:cNvPr id="12" name="Shape 3">
+              <a:extLst>
+                <a:ext uri="{FF2B5EF4-FFF2-40B4-BE49-F238E27FC236}">
+                  <a16:creationId xmlns:a16="http://schemas.microsoft.com/office/drawing/2014/main" id="{154B5FDA-A35A-FB39-836C-EDB0889309D5}"/>
+                </a:ext>
+              </a:extLst>
+            </p:cNvPr>
+            <p:cNvSpPr/>
+            <p:nvPr/>
+          </p:nvSpPr>
+          <p:spPr>
+            <a:xfrm>
+              <a:off x="1957877" y="1681645"/>
+              <a:ext cx="694944" cy="694944"/>
+            </a:xfrm>
+            <a:prstGeom prst="ellipse">
+              <a:avLst/>
+            </a:prstGeom>
+            <a:solidFill>
+              <a:srgbClr val="EAF4F4"/>
+            </a:solidFill>
+            <a:ln/>
+          </p:spPr>
+          <p:txBody>
+            <a:bodyPr/>
+            <a:lstStyle/>
+            <a:p>
+              <a:endParaRPr lang="en-NG" dirty="0"/>
+            </a:p>
+          </p:txBody>
+        </p:sp>
+        <p:sp>
+          <p:nvSpPr>
+            <p:cNvPr id="29" name="Text 5">
+              <a:extLst>
+                <a:ext uri="{FF2B5EF4-FFF2-40B4-BE49-F238E27FC236}">
+                  <a16:creationId xmlns:a16="http://schemas.microsoft.com/office/drawing/2014/main" id="{7B76595B-D6EB-8BC4-2690-330F46A1595C}"/>
+                </a:ext>
+              </a:extLst>
+            </p:cNvPr>
+            <p:cNvSpPr/>
+            <p:nvPr/>
+          </p:nvSpPr>
+          <p:spPr>
+            <a:xfrm>
+              <a:off x="2087482" y="1646499"/>
+              <a:ext cx="694945" cy="681290"/>
+            </a:xfrm>
+            <a:prstGeom prst="rect">
+              <a:avLst/>
+            </a:prstGeom>
+            <a:noFill/>
+            <a:ln/>
+          </p:spPr>
+          <p:txBody>
+            <a:bodyPr wrap="square" rtlCol="0" anchor="ctr"/>
+            <a:lstStyle/>
+            <a:p>
+              <a:r>
+                <a:rPr lang="en-US" sz="2800" b="1" dirty="0">
+                  <a:solidFill>
+                    <a:srgbClr val="477BAB"/>
+                  </a:solidFill>
+                  <a:latin typeface="Arial" panose="020B0604020202020204" pitchFamily="34" charset="0"/>
+                  <a:cs typeface="Arial" panose="020B0604020202020204" pitchFamily="34" charset="0"/>
+                </a:rPr>
+                <a:t>1</a:t>
+              </a:r>
+              <a:endParaRPr lang="en-NG" sz="2800" b="1" dirty="0">
+                <a:solidFill>
+                  <a:srgbClr val="477BAB"/>
+                </a:solidFill>
+                <a:latin typeface="Arial" panose="020B0604020202020204" pitchFamily="34" charset="0"/>
+                <a:cs typeface="Arial" panose="020B0604020202020204" pitchFamily="34" charset="0"/>
+              </a:endParaRPr>
+            </a:p>
+          </p:txBody>
+        </p:sp>
+      </p:grpSp>
+      <p:grpSp>
+        <p:nvGrpSpPr>
+          <p:cNvPr id="3" name="Group 2">
+            <a:extLst>
+              <a:ext uri="{FF2B5EF4-FFF2-40B4-BE49-F238E27FC236}">
+                <a16:creationId xmlns:a16="http://schemas.microsoft.com/office/drawing/2014/main" id="{E87DB20B-FDA9-954B-0E07-809C9C3722EA}"/>
+              </a:ext>
+            </a:extLst>
+          </p:cNvPr>
+          <p:cNvGrpSpPr/>
+          <p:nvPr/>
+        </p:nvGrpSpPr>
+        <p:grpSpPr>
+          <a:xfrm>
+            <a:off x="5328072" y="836387"/>
+            <a:ext cx="867949" cy="694944"/>
+            <a:chOff x="5814062" y="1692978"/>
+            <a:chExt cx="867949" cy="694944"/>
+          </a:xfrm>
+        </p:grpSpPr>
+        <p:sp>
+          <p:nvSpPr>
+            <p:cNvPr id="21" name="Shape 3">
+              <a:extLst>
+                <a:ext uri="{FF2B5EF4-FFF2-40B4-BE49-F238E27FC236}">
+                  <a16:creationId xmlns:a16="http://schemas.microsoft.com/office/drawing/2014/main" id="{657ED316-A807-42F8-79EB-F543A82AF673}"/>
+                </a:ext>
+              </a:extLst>
+            </p:cNvPr>
+            <p:cNvSpPr/>
+            <p:nvPr/>
+          </p:nvSpPr>
+          <p:spPr>
+            <a:xfrm>
+              <a:off x="5814062" y="1692978"/>
+              <a:ext cx="694944" cy="694944"/>
+            </a:xfrm>
+            <a:prstGeom prst="ellipse">
+              <a:avLst/>
+            </a:prstGeom>
+            <a:solidFill>
+              <a:srgbClr val="EAF4F4"/>
+            </a:solidFill>
+            <a:ln/>
+          </p:spPr>
+          <p:txBody>
+            <a:bodyPr/>
+            <a:lstStyle/>
+            <a:p>
+              <a:endParaRPr lang="en-NG" dirty="0"/>
+            </a:p>
+          </p:txBody>
+        </p:sp>
+        <p:sp>
+          <p:nvSpPr>
+            <p:cNvPr id="31" name="Text 5">
+              <a:extLst>
+                <a:ext uri="{FF2B5EF4-FFF2-40B4-BE49-F238E27FC236}">
+                  <a16:creationId xmlns:a16="http://schemas.microsoft.com/office/drawing/2014/main" id="{DC705E24-ECC5-0957-EA6E-EDE36F4C8989}"/>
+                </a:ext>
+              </a:extLst>
+            </p:cNvPr>
+            <p:cNvSpPr/>
+            <p:nvPr/>
+          </p:nvSpPr>
+          <p:spPr>
+            <a:xfrm>
+              <a:off x="5987066" y="1695299"/>
+              <a:ext cx="694945" cy="681290"/>
+            </a:xfrm>
+            <a:prstGeom prst="rect">
+              <a:avLst/>
+            </a:prstGeom>
+            <a:noFill/>
+            <a:ln/>
+          </p:spPr>
+          <p:txBody>
+            <a:bodyPr wrap="square" rtlCol="0" anchor="ctr"/>
+            <a:lstStyle/>
+            <a:p>
+              <a:r>
+                <a:rPr lang="en-US" sz="2800" b="1" dirty="0">
+                  <a:solidFill>
+                    <a:srgbClr val="477BAB"/>
+                  </a:solidFill>
+                  <a:latin typeface="Arial" panose="020B0604020202020204" pitchFamily="34" charset="0"/>
+                  <a:cs typeface="Arial" panose="020B0604020202020204" pitchFamily="34" charset="0"/>
+                </a:rPr>
+                <a:t>2</a:t>
+              </a:r>
+              <a:endParaRPr lang="en-NG" sz="2800" b="1" dirty="0">
+                <a:solidFill>
+                  <a:srgbClr val="477BAB"/>
+                </a:solidFill>
+                <a:latin typeface="Arial" panose="020B0604020202020204" pitchFamily="34" charset="0"/>
+                <a:cs typeface="Arial" panose="020B0604020202020204" pitchFamily="34" charset="0"/>
+              </a:endParaRPr>
+            </a:p>
+          </p:txBody>
+        </p:sp>
+      </p:grpSp>
+      <p:grpSp>
+        <p:nvGrpSpPr>
+          <p:cNvPr id="4" name="Group 3">
+            <a:extLst>
+              <a:ext uri="{FF2B5EF4-FFF2-40B4-BE49-F238E27FC236}">
+                <a16:creationId xmlns:a16="http://schemas.microsoft.com/office/drawing/2014/main" id="{3316CCA8-BD1D-EFF1-B047-C8F2356AF819}"/>
+              </a:ext>
+            </a:extLst>
+          </p:cNvPr>
+          <p:cNvGrpSpPr/>
+          <p:nvPr/>
+        </p:nvGrpSpPr>
+        <p:grpSpPr>
+          <a:xfrm>
+            <a:off x="9025899" y="836387"/>
+            <a:ext cx="838066" cy="705690"/>
+            <a:chOff x="9743529" y="1670899"/>
+            <a:chExt cx="838066" cy="705690"/>
+          </a:xfrm>
+        </p:grpSpPr>
+        <p:sp>
+          <p:nvSpPr>
+            <p:cNvPr id="23" name="Shape 3">
+              <a:extLst>
+                <a:ext uri="{FF2B5EF4-FFF2-40B4-BE49-F238E27FC236}">
+                  <a16:creationId xmlns:a16="http://schemas.microsoft.com/office/drawing/2014/main" id="{234D7558-E659-2FB0-F826-C2F67DA16E93}"/>
+                </a:ext>
+              </a:extLst>
+            </p:cNvPr>
+            <p:cNvSpPr/>
+            <p:nvPr/>
+          </p:nvSpPr>
+          <p:spPr>
+            <a:xfrm>
+              <a:off x="9743529" y="1681645"/>
+              <a:ext cx="694944" cy="694944"/>
+            </a:xfrm>
+            <a:prstGeom prst="ellipse">
+              <a:avLst/>
+            </a:prstGeom>
+            <a:solidFill>
+              <a:srgbClr val="EAF4F4"/>
+            </a:solidFill>
+            <a:ln/>
+          </p:spPr>
+          <p:txBody>
+            <a:bodyPr/>
+            <a:lstStyle/>
+            <a:p>
+              <a:endParaRPr lang="en-NG" dirty="0"/>
+            </a:p>
+          </p:txBody>
+        </p:sp>
+        <p:sp>
+          <p:nvSpPr>
+            <p:cNvPr id="33" name="Text 5">
+              <a:extLst>
+                <a:ext uri="{FF2B5EF4-FFF2-40B4-BE49-F238E27FC236}">
+                  <a16:creationId xmlns:a16="http://schemas.microsoft.com/office/drawing/2014/main" id="{1D2F3245-6274-FD17-B37D-E47E5BF6CF8F}"/>
+                </a:ext>
+              </a:extLst>
+            </p:cNvPr>
+            <p:cNvSpPr/>
+            <p:nvPr/>
+          </p:nvSpPr>
+          <p:spPr>
+            <a:xfrm>
+              <a:off x="9886650" y="1670899"/>
+              <a:ext cx="694945" cy="681290"/>
+            </a:xfrm>
+            <a:prstGeom prst="rect">
+              <a:avLst/>
+            </a:prstGeom>
+            <a:noFill/>
+            <a:ln/>
+          </p:spPr>
+          <p:txBody>
+            <a:bodyPr wrap="square" rtlCol="0" anchor="ctr"/>
+            <a:lstStyle/>
+            <a:p>
+              <a:r>
+                <a:rPr lang="en-US" sz="2800" b="1" dirty="0">
+                  <a:solidFill>
+                    <a:srgbClr val="477BAB"/>
+                  </a:solidFill>
+                  <a:latin typeface="Arial" panose="020B0604020202020204" pitchFamily="34" charset="0"/>
+                  <a:cs typeface="Arial" panose="020B0604020202020204" pitchFamily="34" charset="0"/>
+                </a:rPr>
+                <a:t>3</a:t>
+              </a:r>
+              <a:endParaRPr lang="en-NG" sz="2800" b="1" dirty="0">
+                <a:solidFill>
+                  <a:srgbClr val="477BAB"/>
+                </a:solidFill>
+                <a:latin typeface="Arial" panose="020B0604020202020204" pitchFamily="34" charset="0"/>
+                <a:cs typeface="Arial" panose="020B0604020202020204" pitchFamily="34" charset="0"/>
+              </a:endParaRPr>
+            </a:p>
+          </p:txBody>
+        </p:sp>
+      </p:grpSp>
+      <p:sp>
+        <p:nvSpPr>
+          <p:cNvPr id="35" name="Text 5">
+            <a:extLst>
+              <a:ext uri="{FF2B5EF4-FFF2-40B4-BE49-F238E27FC236}">
+                <a16:creationId xmlns:a16="http://schemas.microsoft.com/office/drawing/2014/main" id="{76300BAD-941C-AC24-24E4-A4F7703BCD45}"/>
+              </a:ext>
+            </a:extLst>
+          </p:cNvPr>
+          <p:cNvSpPr/>
+          <p:nvPr/>
+        </p:nvSpPr>
+        <p:spPr>
+          <a:xfrm>
+            <a:off x="7862448" y="1482531"/>
+            <a:ext cx="2788920" cy="2534005"/>
+          </a:xfrm>
+          <a:prstGeom prst="rect">
+            <a:avLst/>
+          </a:prstGeom>
+          <a:noFill/>
+          <a:ln/>
+        </p:spPr>
+        <p:txBody>
+          <a:bodyPr wrap="square" rtlCol="0" anchor="ctr"/>
+          <a:lstStyle/>
+          <a:p>
+            <a:r>
+              <a:rPr lang="en-NG" sz="1600" dirty="0">
+                <a:solidFill>
+                  <a:srgbClr val="EAF4F4"/>
+                </a:solidFill>
+                <a:latin typeface="Arial" panose="020B0604020202020204" pitchFamily="34" charset="0"/>
+                <a:cs typeface="Arial" panose="020B0604020202020204" pitchFamily="34" charset="0"/>
+              </a:rPr>
+              <a:t>Provide incentives for customers to remain longer, such as loyalty benefits, contract upgrades, bundled services, or preferential offers.</a:t>
+            </a:r>
+            <a:endParaRPr lang="en-US" sz="1600" dirty="0">
+              <a:solidFill>
+                <a:srgbClr val="EAF4F4"/>
+              </a:solidFill>
+              <a:latin typeface="Arial" panose="020B0604020202020204" pitchFamily="34" charset="0"/>
+              <a:cs typeface="Arial" panose="020B0604020202020204" pitchFamily="34" charset="0"/>
+            </a:endParaRPr>
+          </a:p>
+          <a:p>
+            <a:endParaRPr lang="en-NG" sz="1600" dirty="0">
+              <a:solidFill>
+                <a:srgbClr val="EAF4F4"/>
+              </a:solidFill>
+              <a:latin typeface="Arial" panose="020B0604020202020204" pitchFamily="34" charset="0"/>
+              <a:cs typeface="Arial" panose="020B0604020202020204" pitchFamily="34" charset="0"/>
+            </a:endParaRPr>
+          </a:p>
+          <a:p>
+            <a:r>
+              <a:rPr lang="en-NG" sz="1600" b="1" dirty="0">
+                <a:solidFill>
+                  <a:srgbClr val="EAF4F4"/>
+                </a:solidFill>
+                <a:latin typeface="Arial" panose="020B0604020202020204" pitchFamily="34" charset="0"/>
+                <a:cs typeface="Arial" panose="020B0604020202020204" pitchFamily="34" charset="0"/>
+              </a:rPr>
+              <a:t>Focus especially on:</a:t>
+            </a:r>
+            <a:r>
+              <a:rPr lang="en-NG" sz="1600" dirty="0">
+                <a:solidFill>
+                  <a:srgbClr val="EAF4F4"/>
+                </a:solidFill>
+                <a:latin typeface="Arial" panose="020B0604020202020204" pitchFamily="34" charset="0"/>
+                <a:cs typeface="Arial" panose="020B0604020202020204" pitchFamily="34" charset="0"/>
+              </a:rPr>
+              <a:t> month-to-month and higher-risk customers.</a:t>
+            </a:r>
+          </a:p>
+        </p:txBody>
+      </p:sp>
+      <p:sp>
+        <p:nvSpPr>
+          <p:cNvPr id="7" name="Shape 3">
+            <a:extLst>
+              <a:ext uri="{FF2B5EF4-FFF2-40B4-BE49-F238E27FC236}">
+                <a16:creationId xmlns:a16="http://schemas.microsoft.com/office/drawing/2014/main" id="{92F2359B-0017-3418-4FC5-2B434D6D4CED}"/>
+              </a:ext>
+            </a:extLst>
+          </p:cNvPr>
+          <p:cNvSpPr/>
+          <p:nvPr/>
+        </p:nvSpPr>
+        <p:spPr>
+          <a:xfrm>
+            <a:off x="491458" y="4096236"/>
+            <a:ext cx="5127198" cy="2715169"/>
+          </a:xfrm>
+          <a:prstGeom prst="roundRect">
+            <a:avLst>
+              <a:gd name="adj" fmla="val 2791"/>
+            </a:avLst>
+          </a:prstGeom>
+          <a:solidFill>
+            <a:srgbClr val="477BAB"/>
+          </a:solidFill>
+          <a:ln/>
+        </p:spPr>
+        <p:txBody>
+          <a:bodyPr/>
+          <a:lstStyle/>
+          <a:p>
+            <a:endParaRPr lang="en-NG" dirty="0"/>
+          </a:p>
+        </p:txBody>
+      </p:sp>
+      <p:sp>
+        <p:nvSpPr>
+          <p:cNvPr id="9" name="Shape 3">
+            <a:extLst>
+              <a:ext uri="{FF2B5EF4-FFF2-40B4-BE49-F238E27FC236}">
+                <a16:creationId xmlns:a16="http://schemas.microsoft.com/office/drawing/2014/main" id="{35572D42-2584-D825-1A34-49A00E5C7101}"/>
+              </a:ext>
+            </a:extLst>
+          </p:cNvPr>
+          <p:cNvSpPr/>
+          <p:nvPr/>
+        </p:nvSpPr>
+        <p:spPr>
+          <a:xfrm>
+            <a:off x="5741044" y="4112043"/>
+            <a:ext cx="5127198" cy="2715169"/>
+          </a:xfrm>
+          <a:prstGeom prst="roundRect">
+            <a:avLst>
+              <a:gd name="adj" fmla="val 2791"/>
+            </a:avLst>
+          </a:prstGeom>
+          <a:solidFill>
+            <a:srgbClr val="477BAB"/>
+          </a:solidFill>
+          <a:ln/>
+        </p:spPr>
+        <p:txBody>
+          <a:bodyPr/>
+          <a:lstStyle/>
+          <a:p>
+            <a:endParaRPr lang="en-NG" dirty="0"/>
+          </a:p>
+        </p:txBody>
+      </p:sp>
+      <p:grpSp>
+        <p:nvGrpSpPr>
+          <p:cNvPr id="10" name="Group 9">
+            <a:extLst>
+              <a:ext uri="{FF2B5EF4-FFF2-40B4-BE49-F238E27FC236}">
+                <a16:creationId xmlns:a16="http://schemas.microsoft.com/office/drawing/2014/main" id="{66F01118-BD13-6841-9305-5FB271D36515}"/>
+              </a:ext>
+            </a:extLst>
+          </p:cNvPr>
+          <p:cNvGrpSpPr/>
+          <p:nvPr/>
+        </p:nvGrpSpPr>
+        <p:grpSpPr>
+          <a:xfrm>
+            <a:off x="2707585" y="4242258"/>
+            <a:ext cx="839764" cy="733845"/>
+            <a:chOff x="3041175" y="4946449"/>
+            <a:chExt cx="839764" cy="733845"/>
+          </a:xfrm>
+        </p:grpSpPr>
+        <p:sp>
+          <p:nvSpPr>
+            <p:cNvPr id="11" name="Shape 3">
+              <a:extLst>
+                <a:ext uri="{FF2B5EF4-FFF2-40B4-BE49-F238E27FC236}">
+                  <a16:creationId xmlns:a16="http://schemas.microsoft.com/office/drawing/2014/main" id="{1DBC5071-35C8-E6F3-2AAE-1C8D85D47D73}"/>
+                </a:ext>
+              </a:extLst>
+            </p:cNvPr>
+            <p:cNvSpPr/>
+            <p:nvPr/>
+          </p:nvSpPr>
+          <p:spPr>
+            <a:xfrm>
+              <a:off x="3041175" y="4985350"/>
+              <a:ext cx="694944" cy="694944"/>
+            </a:xfrm>
+            <a:prstGeom prst="ellipse">
+              <a:avLst/>
+            </a:prstGeom>
+            <a:solidFill>
+              <a:srgbClr val="EAF4F4"/>
+            </a:solidFill>
+            <a:ln/>
+          </p:spPr>
+          <p:txBody>
+            <a:bodyPr/>
+            <a:lstStyle/>
+            <a:p>
+              <a:endParaRPr lang="en-NG" dirty="0"/>
+            </a:p>
+          </p:txBody>
+        </p:sp>
+        <p:sp>
+          <p:nvSpPr>
+            <p:cNvPr id="13" name="Text 5">
+              <a:extLst>
+                <a:ext uri="{FF2B5EF4-FFF2-40B4-BE49-F238E27FC236}">
+                  <a16:creationId xmlns:a16="http://schemas.microsoft.com/office/drawing/2014/main" id="{7F91C75A-70DA-50AA-9EEC-5CAA00CF14BE}"/>
+                </a:ext>
+              </a:extLst>
+            </p:cNvPr>
+            <p:cNvSpPr/>
+            <p:nvPr/>
+          </p:nvSpPr>
+          <p:spPr>
+            <a:xfrm>
+              <a:off x="3185994" y="4946449"/>
+              <a:ext cx="694945" cy="681290"/>
+            </a:xfrm>
+            <a:prstGeom prst="rect">
+              <a:avLst/>
+            </a:prstGeom>
+            <a:noFill/>
+            <a:ln/>
+          </p:spPr>
+          <p:txBody>
+            <a:bodyPr wrap="square" rtlCol="0" anchor="ctr"/>
+            <a:lstStyle/>
+            <a:p>
+              <a:r>
+                <a:rPr lang="en-US" sz="2800" b="1" dirty="0">
+                  <a:solidFill>
+                    <a:srgbClr val="477BAB"/>
+                  </a:solidFill>
+                  <a:latin typeface="Arial" panose="020B0604020202020204" pitchFamily="34" charset="0"/>
+                  <a:cs typeface="Arial" panose="020B0604020202020204" pitchFamily="34" charset="0"/>
+                </a:rPr>
+                <a:t>4</a:t>
+              </a:r>
+              <a:endParaRPr lang="en-NG" sz="2800" b="1" dirty="0">
+                <a:solidFill>
+                  <a:srgbClr val="477BAB"/>
+                </a:solidFill>
+                <a:latin typeface="Arial" panose="020B0604020202020204" pitchFamily="34" charset="0"/>
+                <a:cs typeface="Arial" panose="020B0604020202020204" pitchFamily="34" charset="0"/>
+              </a:endParaRPr>
+            </a:p>
+          </p:txBody>
+        </p:sp>
+      </p:grpSp>
+      <p:grpSp>
+        <p:nvGrpSpPr>
+          <p:cNvPr id="15" name="Group 14">
+            <a:extLst>
+              <a:ext uri="{FF2B5EF4-FFF2-40B4-BE49-F238E27FC236}">
+                <a16:creationId xmlns:a16="http://schemas.microsoft.com/office/drawing/2014/main" id="{B6F249EA-7450-A38F-1F16-A111DFCDB027}"/>
+              </a:ext>
+            </a:extLst>
+          </p:cNvPr>
+          <p:cNvGrpSpPr/>
+          <p:nvPr/>
+        </p:nvGrpSpPr>
+        <p:grpSpPr>
+          <a:xfrm>
+            <a:off x="7990459" y="4242258"/>
+            <a:ext cx="867949" cy="694944"/>
+            <a:chOff x="5814062" y="1692978"/>
+            <a:chExt cx="867949" cy="694944"/>
+          </a:xfrm>
+        </p:grpSpPr>
+        <p:sp>
+          <p:nvSpPr>
+            <p:cNvPr id="16" name="Shape 3">
+              <a:extLst>
+                <a:ext uri="{FF2B5EF4-FFF2-40B4-BE49-F238E27FC236}">
+                  <a16:creationId xmlns:a16="http://schemas.microsoft.com/office/drawing/2014/main" id="{B0660F65-C0C6-912D-C068-F7BC99753991}"/>
+                </a:ext>
+              </a:extLst>
+            </p:cNvPr>
+            <p:cNvSpPr/>
+            <p:nvPr/>
+          </p:nvSpPr>
+          <p:spPr>
+            <a:xfrm>
+              <a:off x="5814062" y="1692978"/>
+              <a:ext cx="694944" cy="694944"/>
+            </a:xfrm>
+            <a:prstGeom prst="ellipse">
+              <a:avLst/>
+            </a:prstGeom>
+            <a:solidFill>
+              <a:srgbClr val="EAF4F4"/>
+            </a:solidFill>
+            <a:ln/>
+          </p:spPr>
+          <p:txBody>
+            <a:bodyPr/>
+            <a:lstStyle/>
+            <a:p>
+              <a:endParaRPr lang="en-NG" dirty="0"/>
+            </a:p>
+          </p:txBody>
+        </p:sp>
+        <p:sp>
+          <p:nvSpPr>
+            <p:cNvPr id="18" name="Text 5">
+              <a:extLst>
+                <a:ext uri="{FF2B5EF4-FFF2-40B4-BE49-F238E27FC236}">
+                  <a16:creationId xmlns:a16="http://schemas.microsoft.com/office/drawing/2014/main" id="{AA39508B-5ACC-F47C-076C-C40BC81A58B0}"/>
+                </a:ext>
+              </a:extLst>
+            </p:cNvPr>
+            <p:cNvSpPr/>
+            <p:nvPr/>
+          </p:nvSpPr>
+          <p:spPr>
+            <a:xfrm>
+              <a:off x="5987066" y="1695299"/>
+              <a:ext cx="694945" cy="681290"/>
+            </a:xfrm>
+            <a:prstGeom prst="rect">
+              <a:avLst/>
+            </a:prstGeom>
+            <a:noFill/>
+            <a:ln/>
+          </p:spPr>
+          <p:txBody>
+            <a:bodyPr wrap="square" rtlCol="0" anchor="ctr"/>
+            <a:lstStyle/>
+            <a:p>
+              <a:r>
+                <a:rPr lang="en-US" sz="2800" b="1" dirty="0">
+                  <a:solidFill>
+                    <a:srgbClr val="477BAB"/>
+                  </a:solidFill>
+                  <a:latin typeface="Arial" panose="020B0604020202020204" pitchFamily="34" charset="0"/>
+                  <a:cs typeface="Arial" panose="020B0604020202020204" pitchFamily="34" charset="0"/>
+                </a:rPr>
+                <a:t>5</a:t>
+              </a:r>
+              <a:endParaRPr lang="en-NG" sz="2800" b="1" dirty="0">
+                <a:solidFill>
+                  <a:srgbClr val="477BAB"/>
+                </a:solidFill>
+                <a:latin typeface="Arial" panose="020B0604020202020204" pitchFamily="34" charset="0"/>
+                <a:cs typeface="Arial" panose="020B0604020202020204" pitchFamily="34" charset="0"/>
+              </a:endParaRPr>
+            </a:p>
+          </p:txBody>
+        </p:sp>
+      </p:grpSp>
+      <p:sp>
+        <p:nvSpPr>
+          <p:cNvPr id="28" name="Text 5">
+            <a:extLst>
+              <a:ext uri="{FF2B5EF4-FFF2-40B4-BE49-F238E27FC236}">
+                <a16:creationId xmlns:a16="http://schemas.microsoft.com/office/drawing/2014/main" id="{AA449EAC-88C4-C6BB-ECA3-A5CF56B7475E}"/>
+              </a:ext>
+            </a:extLst>
+          </p:cNvPr>
+          <p:cNvSpPr/>
+          <p:nvPr/>
+        </p:nvSpPr>
+        <p:spPr>
+          <a:xfrm>
+            <a:off x="605493" y="4922607"/>
+            <a:ext cx="4511781" cy="1834486"/>
+          </a:xfrm>
+          <a:prstGeom prst="rect">
+            <a:avLst/>
+          </a:prstGeom>
+          <a:noFill/>
+          <a:ln/>
+        </p:spPr>
+        <p:txBody>
+          <a:bodyPr wrap="square" rtlCol="0" anchor="ctr"/>
+          <a:lstStyle/>
+          <a:p>
+            <a:r>
+              <a:rPr lang="en-NG" sz="1600" dirty="0">
+                <a:solidFill>
+                  <a:srgbClr val="EAF4F4"/>
+                </a:solidFill>
+                <a:latin typeface="Arial" panose="020B0604020202020204" pitchFamily="34" charset="0"/>
+                <a:cs typeface="Arial" panose="020B0604020202020204" pitchFamily="34" charset="0"/>
+              </a:rPr>
+              <a:t>Because the box plot shows differences in monthly-charge distributions between churn groups, management should investigate whether particular charge levels or service combinations are associated with higher churn.</a:t>
+            </a:r>
+          </a:p>
+          <a:p>
+            <a:r>
+              <a:rPr lang="en-NG" sz="1600" b="1" dirty="0">
+                <a:solidFill>
+                  <a:srgbClr val="EAF4F4"/>
+                </a:solidFill>
+                <a:latin typeface="Arial" panose="020B0604020202020204" pitchFamily="34" charset="0"/>
+                <a:cs typeface="Arial" panose="020B0604020202020204" pitchFamily="34" charset="0"/>
+              </a:rPr>
+              <a:t>Measure:</a:t>
+            </a:r>
+            <a:r>
+              <a:rPr lang="en-NG" sz="1600" dirty="0">
+                <a:solidFill>
+                  <a:srgbClr val="EAF4F4"/>
+                </a:solidFill>
+                <a:latin typeface="Arial" panose="020B0604020202020204" pitchFamily="34" charset="0"/>
+                <a:cs typeface="Arial" panose="020B0604020202020204" pitchFamily="34" charset="0"/>
+              </a:rPr>
+              <a:t> Churn rate by monthly-charge bands and relevant customer segments.</a:t>
+            </a:r>
+          </a:p>
+        </p:txBody>
+      </p:sp>
+      <p:sp>
+        <p:nvSpPr>
+          <p:cNvPr id="32" name="Text 5">
+            <a:extLst>
+              <a:ext uri="{FF2B5EF4-FFF2-40B4-BE49-F238E27FC236}">
+                <a16:creationId xmlns:a16="http://schemas.microsoft.com/office/drawing/2014/main" id="{CC3FE6C1-9BDD-D0C6-8B4A-392350A2CB25}"/>
+              </a:ext>
+            </a:extLst>
+          </p:cNvPr>
+          <p:cNvSpPr/>
+          <p:nvPr/>
+        </p:nvSpPr>
+        <p:spPr>
+          <a:xfrm>
+            <a:off x="5868575" y="4888838"/>
+            <a:ext cx="4511781" cy="1834486"/>
+          </a:xfrm>
+          <a:prstGeom prst="rect">
+            <a:avLst/>
+          </a:prstGeom>
+          <a:noFill/>
+          <a:ln/>
+        </p:spPr>
+        <p:txBody>
+          <a:bodyPr wrap="square" rtlCol="0" anchor="ctr"/>
+          <a:lstStyle/>
+          <a:p>
+            <a:r>
+              <a:rPr lang="en-NG" sz="1600" dirty="0">
+                <a:solidFill>
+                  <a:srgbClr val="EAF4F4"/>
+                </a:solidFill>
+                <a:latin typeface="Arial" panose="020B0604020202020204" pitchFamily="34" charset="0"/>
+                <a:cs typeface="Arial" panose="020B0604020202020204" pitchFamily="34" charset="0"/>
+              </a:rPr>
+              <a:t>Create a structured engagement process for newer customers, including onboarding communication, service education and early satisfaction checks.</a:t>
+            </a:r>
+          </a:p>
+          <a:p>
+            <a:r>
+              <a:rPr lang="en-NG" sz="1600" b="1" dirty="0">
+                <a:solidFill>
+                  <a:srgbClr val="EAF4F4"/>
+                </a:solidFill>
+                <a:latin typeface="Arial" panose="020B0604020202020204" pitchFamily="34" charset="0"/>
+                <a:cs typeface="Arial" panose="020B0604020202020204" pitchFamily="34" charset="0"/>
+              </a:rPr>
+              <a:t>Measure:</a:t>
+            </a:r>
+            <a:r>
+              <a:rPr lang="en-NG" sz="1600" dirty="0">
+                <a:solidFill>
+                  <a:srgbClr val="EAF4F4"/>
+                </a:solidFill>
+                <a:latin typeface="Arial" panose="020B0604020202020204" pitchFamily="34" charset="0"/>
+                <a:cs typeface="Arial" panose="020B0604020202020204" pitchFamily="34" charset="0"/>
+              </a:rPr>
+              <a:t> Churn rate among customers within defined early-tenure periods.</a:t>
+            </a:r>
+          </a:p>
+        </p:txBody>
+      </p:sp>
+    </p:spTree>
+    <p:extLst>
+      <p:ext uri="{BB962C8B-B14F-4D97-AF65-F5344CB8AC3E}">
+        <p14:creationId xmlns:p14="http://schemas.microsoft.com/office/powerpoint/2010/main" val="1870950161"/>
+      </p:ext>
+    </p:extLst>
+  </p:cSld>
+  <p:clrMapOvr>
+    <a:masterClrMapping/>
+  </p:clrMapOvr>
+</p:sld>
+</file>
+
+<file path=ppt/slides/slide11.xml><?xml version="1.0" encoding="utf-8"?>
 <p:sld xmlns:a="http://schemas.openxmlformats.org/drawingml/2006/main" xmlns:r="http://schemas.openxmlformats.org/officeDocument/2006/relationships" xmlns:p="http://schemas.openxmlformats.org/presentationml/2006/main">
   <p:cSld>
     <p:bg>
@@ -16331,6 +17564,60 @@
       </p:sp>
       <p:sp>
         <p:nvSpPr>
+          <p:cNvPr id="4" name="Rectangle 3">
+            <a:extLst>
+              <a:ext uri="{FF2B5EF4-FFF2-40B4-BE49-F238E27FC236}">
+                <a16:creationId xmlns:a16="http://schemas.microsoft.com/office/drawing/2014/main" id="{696E65FF-CA23-1E7F-DA1D-2E3EFE4761BD}"/>
+              </a:ext>
+            </a:extLst>
+          </p:cNvPr>
+          <p:cNvSpPr/>
+          <p:nvPr/>
+        </p:nvSpPr>
+        <p:spPr>
+          <a:xfrm>
+            <a:off x="611256" y="2411531"/>
+            <a:ext cx="9979579" cy="1662758"/>
+          </a:xfrm>
+          <a:prstGeom prst="rect">
+            <a:avLst/>
+          </a:prstGeom>
+          <a:solidFill>
+            <a:srgbClr val="477BAB"/>
+          </a:solidFill>
+          <a:ln w="15875">
+            <a:solidFill>
+              <a:srgbClr val="002060"/>
+            </a:solidFill>
+          </a:ln>
+        </p:spPr>
+        <p:style>
+          <a:lnRef idx="2">
+            <a:schemeClr val="accent1">
+              <a:shade val="15000"/>
+            </a:schemeClr>
+          </a:lnRef>
+          <a:fillRef idx="1">
+            <a:schemeClr val="accent1"/>
+          </a:fillRef>
+          <a:effectRef idx="0">
+            <a:schemeClr val="accent1"/>
+          </a:effectRef>
+          <a:fontRef idx="minor">
+            <a:schemeClr val="lt1"/>
+          </a:fontRef>
+        </p:style>
+        <p:txBody>
+          <a:bodyPr rtlCol="0" anchor="ctr"/>
+          <a:lstStyle/>
+          <a:p>
+            <a:pPr algn="ctr"/>
+            <a:endParaRPr lang="en-NG" dirty="0"/>
+          </a:p>
+        </p:txBody>
+      </p:sp>
+      <p:sp>
+        <p:nvSpPr>
           <p:cNvPr id="3" name="Text 2">
             <a:extLst>
               <a:ext uri="{FF2B5EF4-FFF2-40B4-BE49-F238E27FC236}">
@@ -16365,7 +17652,7 @@
             <a:r>
               <a:rPr lang="en-US" sz="2400" dirty="0">
                 <a:solidFill>
-                  <a:srgbClr val="477BAB"/>
+                  <a:srgbClr val="EAF4F4"/>
                 </a:solidFill>
                 <a:latin typeface="Arial" panose="020B0604020202020204" pitchFamily="34" charset="0"/>
                 <a:ea typeface="Cambria" pitchFamily="34" charset="-122"/>
@@ -16375,7 +17662,7 @@
             </a:r>
             <a:endParaRPr lang="en-US" sz="2400" dirty="0">
               <a:solidFill>
-                <a:srgbClr val="477BAB"/>
+                <a:srgbClr val="EAF4F4"/>
               </a:solidFill>
               <a:latin typeface="Arial" panose="020B0604020202020204" pitchFamily="34" charset="0"/>
               <a:cs typeface="Arial" panose="020B0604020202020204" pitchFamily="34" charset="0"/>
@@ -18364,9 +19651,7 @@
             <a:avLst/>
           </a:prstGeom>
           <a:solidFill>
-            <a:srgbClr val="0070C0">
-              <a:alpha val="40000"/>
-            </a:srgbClr>
+            <a:srgbClr val="0070C0"/>
           </a:solidFill>
           <a:ln w="15875">
             <a:solidFill>
@@ -22535,7 +23820,7 @@
                 <a:ea typeface="Cambria" pitchFamily="34" charset="-122"/>
                 <a:cs typeface="Arial" panose="020B0604020202020204" pitchFamily="34" charset="0"/>
               </a:rPr>
-              <a:t>KEY FINDING</a:t>
+              <a:t>INSIGHT</a:t>
             </a:r>
             <a:endParaRPr lang="en-US" sz="1700" dirty="0">
               <a:latin typeface="Arial" panose="020B0604020202020204" pitchFamily="34" charset="0"/>
@@ -22833,9 +24118,7 @@
             <a:r>
               <a:rPr lang="en-US" sz="1600" b="1" dirty="0">
                 <a:solidFill>
-                  <a:schemeClr val="accent1">
-                    <a:lumMod val="75000"/>
-                  </a:schemeClr>
+                  <a:srgbClr val="477BAB"/>
                 </a:solidFill>
                 <a:latin typeface="Arial" panose="020B0604020202020204" pitchFamily="34" charset="0"/>
                 <a:cs typeface="Arial" panose="020B0604020202020204" pitchFamily="34" charset="0"/>
@@ -22844,9 +24127,7 @@
             </a:r>
             <a:endParaRPr lang="en-NG" sz="1600" b="1" dirty="0">
               <a:solidFill>
-                <a:schemeClr val="accent1">
-                  <a:lumMod val="75000"/>
-                </a:schemeClr>
+                <a:srgbClr val="477BAB"/>
               </a:solidFill>
               <a:latin typeface="Arial" panose="020B0604020202020204" pitchFamily="34" charset="0"/>
               <a:cs typeface="Arial" panose="020B0604020202020204" pitchFamily="34" charset="0"/>
@@ -22896,7 +24177,7 @@
                 <a:ea typeface="Cambria" pitchFamily="34" charset="-122"/>
                 <a:cs typeface="Arial" panose="020B0604020202020204" pitchFamily="34" charset="0"/>
               </a:rPr>
-              <a:t>KEY FINDING</a:t>
+              <a:t>INSIGHT</a:t>
             </a:r>
             <a:endParaRPr lang="en-US" sz="1700" dirty="0">
               <a:solidFill>
@@ -22975,7 +24256,7 @@
               <p:nvPr>
                 <p:extLst>
                   <p:ext uri="{D42A27DB-BD31-4B8C-83A1-F6EECF244321}">
-                    <p14:modId xmlns:p14="http://schemas.microsoft.com/office/powerpoint/2010/main" val="2933929064"/>
+                    <p14:modId xmlns:p14="http://schemas.microsoft.com/office/powerpoint/2010/main" val="741769385"/>
                   </p:ext>
                 </p:extLst>
               </p:nvPr>
@@ -25886,8 +27167,8 @@
         </p:nvSpPr>
         <p:spPr>
           <a:xfrm>
-            <a:off x="851120" y="908522"/>
-            <a:ext cx="10757784" cy="1357600"/>
+            <a:off x="851120" y="865450"/>
+            <a:ext cx="10757784" cy="807256"/>
           </a:xfrm>
           <a:prstGeom prst="rect">
             <a:avLst/>
@@ -25962,7 +27243,7 @@
                 <a:latin typeface="Arial" panose="020B0604020202020204" pitchFamily="34" charset="0"/>
                 <a:cs typeface="Arial" panose="020B0604020202020204" pitchFamily="34" charset="0"/>
               </a:rPr>
-              <a:t>Key Findings</a:t>
+              <a:t>Insights</a:t>
             </a:r>
             <a:endParaRPr lang="en-NG" b="1" dirty="0">
               <a:solidFill>
@@ -25988,8 +27269,8 @@
         </p:nvSpPr>
         <p:spPr>
           <a:xfrm>
-            <a:off x="851120" y="2435669"/>
-            <a:ext cx="10757784" cy="1357600"/>
+            <a:off x="851120" y="1759888"/>
+            <a:ext cx="10757784" cy="932850"/>
           </a:xfrm>
           <a:prstGeom prst="rect">
             <a:avLst/>
@@ -26044,8 +27325,8 @@
         </p:nvSpPr>
         <p:spPr>
           <a:xfrm>
-            <a:off x="851120" y="4084879"/>
-            <a:ext cx="10757784" cy="1357600"/>
+            <a:off x="851120" y="2840391"/>
+            <a:ext cx="10757784" cy="976979"/>
           </a:xfrm>
           <a:prstGeom prst="rect">
             <a:avLst/>
@@ -26100,60 +27381,8 @@
         </p:nvSpPr>
         <p:spPr>
           <a:xfrm>
-            <a:off x="1188801" y="1192584"/>
-            <a:ext cx="731520" cy="731520"/>
-          </a:xfrm>
-          <a:prstGeom prst="ellipse">
-            <a:avLst/>
-          </a:prstGeom>
-          <a:solidFill>
-            <a:srgbClr val="477BAB"/>
-          </a:solidFill>
-          <a:ln/>
-        </p:spPr>
-      </p:sp>
-      <p:sp>
-        <p:nvSpPr>
-          <p:cNvPr id="17" name="Shape 7">
-            <a:extLst>
-              <a:ext uri="{FF2B5EF4-FFF2-40B4-BE49-F238E27FC236}">
-                <a16:creationId xmlns:a16="http://schemas.microsoft.com/office/drawing/2014/main" id="{B6C6BFD5-0796-0695-6C7B-54FE34BC007C}"/>
-              </a:ext>
-            </a:extLst>
-          </p:cNvPr>
-          <p:cNvSpPr/>
-          <p:nvPr/>
-        </p:nvSpPr>
-        <p:spPr>
-          <a:xfrm>
-            <a:off x="1204893" y="4397919"/>
-            <a:ext cx="731520" cy="731520"/>
-          </a:xfrm>
-          <a:prstGeom prst="ellipse">
-            <a:avLst/>
-          </a:prstGeom>
-          <a:solidFill>
-            <a:srgbClr val="477BAB"/>
-          </a:solidFill>
-          <a:ln/>
-        </p:spPr>
-      </p:sp>
-      <p:sp>
-        <p:nvSpPr>
-          <p:cNvPr id="19" name="Shape 7">
-            <a:extLst>
-              <a:ext uri="{FF2B5EF4-FFF2-40B4-BE49-F238E27FC236}">
-                <a16:creationId xmlns:a16="http://schemas.microsoft.com/office/drawing/2014/main" id="{62516B88-60DF-75BD-9E5E-17FAAF688AA5}"/>
-              </a:ext>
-            </a:extLst>
-          </p:cNvPr>
-          <p:cNvSpPr/>
-          <p:nvPr/>
-        </p:nvSpPr>
-        <p:spPr>
-          <a:xfrm>
-            <a:off x="1204893" y="2795252"/>
-            <a:ext cx="731520" cy="731520"/>
+            <a:off x="1150871" y="949969"/>
+            <a:ext cx="636255" cy="681290"/>
           </a:xfrm>
           <a:prstGeom prst="ellipse">
             <a:avLst/>
@@ -26178,8 +27407,8 @@
         </p:nvSpPr>
         <p:spPr>
           <a:xfrm>
-            <a:off x="2290186" y="991416"/>
-            <a:ext cx="8869680" cy="1298448"/>
+            <a:off x="2171449" y="949969"/>
+            <a:ext cx="8869680" cy="681290"/>
           </a:xfrm>
           <a:prstGeom prst="rect">
             <a:avLst/>
@@ -26232,8 +27461,8 @@
         </p:nvSpPr>
         <p:spPr>
           <a:xfrm>
-            <a:off x="2290186" y="2459411"/>
-            <a:ext cx="8869680" cy="1298448"/>
+            <a:off x="2134572" y="1821731"/>
+            <a:ext cx="8869680" cy="976979"/>
           </a:xfrm>
           <a:prstGeom prst="rect">
             <a:avLst/>
@@ -26286,8 +27515,8 @@
         </p:nvSpPr>
         <p:spPr>
           <a:xfrm>
-            <a:off x="2290186" y="4114455"/>
-            <a:ext cx="8869680" cy="1298448"/>
+            <a:off x="2097696" y="2989182"/>
+            <a:ext cx="8869680" cy="845969"/>
           </a:xfrm>
           <a:prstGeom prst="rect">
             <a:avLst/>
@@ -26338,7 +27567,7 @@
         </p:nvSpPr>
         <p:spPr>
           <a:xfrm>
-            <a:off x="1347145" y="1233943"/>
+            <a:off x="1284065" y="970693"/>
             <a:ext cx="573176" cy="681290"/>
           </a:xfrm>
           <a:prstGeom prst="rect">
@@ -26371,12 +27600,200 @@
           </a:p>
         </p:txBody>
       </p:sp>
+      <p:grpSp>
+        <p:nvGrpSpPr>
+          <p:cNvPr id="2" name="Group 1">
+            <a:extLst>
+              <a:ext uri="{FF2B5EF4-FFF2-40B4-BE49-F238E27FC236}">
+                <a16:creationId xmlns:a16="http://schemas.microsoft.com/office/drawing/2014/main" id="{DCB313C7-607D-E91D-771A-7E49C0EDC219}"/>
+              </a:ext>
+            </a:extLst>
+          </p:cNvPr>
+          <p:cNvGrpSpPr/>
+          <p:nvPr/>
+        </p:nvGrpSpPr>
+        <p:grpSpPr>
+          <a:xfrm>
+            <a:off x="1176285" y="1911907"/>
+            <a:ext cx="636255" cy="686521"/>
+            <a:chOff x="1204893" y="2795252"/>
+            <a:chExt cx="731520" cy="731520"/>
+          </a:xfrm>
+        </p:grpSpPr>
+        <p:sp>
+          <p:nvSpPr>
+            <p:cNvPr id="19" name="Shape 7">
+              <a:extLst>
+                <a:ext uri="{FF2B5EF4-FFF2-40B4-BE49-F238E27FC236}">
+                  <a16:creationId xmlns:a16="http://schemas.microsoft.com/office/drawing/2014/main" id="{62516B88-60DF-75BD-9E5E-17FAAF688AA5}"/>
+                </a:ext>
+              </a:extLst>
+            </p:cNvPr>
+            <p:cNvSpPr/>
+            <p:nvPr/>
+          </p:nvSpPr>
+          <p:spPr>
+            <a:xfrm>
+              <a:off x="1204893" y="2795252"/>
+              <a:ext cx="731520" cy="731520"/>
+            </a:xfrm>
+            <a:prstGeom prst="ellipse">
+              <a:avLst/>
+            </a:prstGeom>
+            <a:solidFill>
+              <a:srgbClr val="477BAB"/>
+            </a:solidFill>
+            <a:ln/>
+          </p:spPr>
+        </p:sp>
+        <p:sp>
+          <p:nvSpPr>
+            <p:cNvPr id="34" name="Text 5">
+              <a:extLst>
+                <a:ext uri="{FF2B5EF4-FFF2-40B4-BE49-F238E27FC236}">
+                  <a16:creationId xmlns:a16="http://schemas.microsoft.com/office/drawing/2014/main" id="{651ECCFB-CDA3-95AA-2901-04A27902365C}"/>
+                </a:ext>
+              </a:extLst>
+            </p:cNvPr>
+            <p:cNvSpPr/>
+            <p:nvPr/>
+          </p:nvSpPr>
+          <p:spPr>
+            <a:xfrm>
+              <a:off x="1363237" y="2845482"/>
+              <a:ext cx="573176" cy="681290"/>
+            </a:xfrm>
+            <a:prstGeom prst="rect">
+              <a:avLst/>
+            </a:prstGeom>
+            <a:noFill/>
+            <a:ln/>
+          </p:spPr>
+          <p:txBody>
+            <a:bodyPr wrap="square" rtlCol="0" anchor="ctr"/>
+            <a:lstStyle/>
+            <a:p>
+              <a:r>
+                <a:rPr lang="en-US" sz="2800" b="1" dirty="0">
+                  <a:solidFill>
+                    <a:srgbClr val="EAF4F4"/>
+                  </a:solidFill>
+                  <a:latin typeface="Arial" panose="020B0604020202020204" pitchFamily="34" charset="0"/>
+                  <a:cs typeface="Arial" panose="020B0604020202020204" pitchFamily="34" charset="0"/>
+                </a:rPr>
+                <a:t>2</a:t>
+              </a:r>
+              <a:endParaRPr lang="en-NG" sz="2800" b="1" dirty="0">
+                <a:solidFill>
+                  <a:srgbClr val="EAF4F4"/>
+                </a:solidFill>
+                <a:latin typeface="Arial" panose="020B0604020202020204" pitchFamily="34" charset="0"/>
+                <a:cs typeface="Arial" panose="020B0604020202020204" pitchFamily="34" charset="0"/>
+              </a:endParaRPr>
+            </a:p>
+          </p:txBody>
+        </p:sp>
+      </p:grpSp>
+      <p:grpSp>
+        <p:nvGrpSpPr>
+          <p:cNvPr id="4" name="Group 3">
+            <a:extLst>
+              <a:ext uri="{FF2B5EF4-FFF2-40B4-BE49-F238E27FC236}">
+                <a16:creationId xmlns:a16="http://schemas.microsoft.com/office/drawing/2014/main" id="{37ED89B6-0040-FBE8-0759-7663B37A3D07}"/>
+              </a:ext>
+            </a:extLst>
+          </p:cNvPr>
+          <p:cNvGrpSpPr/>
+          <p:nvPr/>
+        </p:nvGrpSpPr>
+        <p:grpSpPr>
+          <a:xfrm>
+            <a:off x="1190930" y="2978212"/>
+            <a:ext cx="573176" cy="597195"/>
+            <a:chOff x="1204893" y="4397919"/>
+            <a:chExt cx="731520" cy="731520"/>
+          </a:xfrm>
+        </p:grpSpPr>
+        <p:sp>
+          <p:nvSpPr>
+            <p:cNvPr id="17" name="Shape 7">
+              <a:extLst>
+                <a:ext uri="{FF2B5EF4-FFF2-40B4-BE49-F238E27FC236}">
+                  <a16:creationId xmlns:a16="http://schemas.microsoft.com/office/drawing/2014/main" id="{B6C6BFD5-0796-0695-6C7B-54FE34BC007C}"/>
+                </a:ext>
+              </a:extLst>
+            </p:cNvPr>
+            <p:cNvSpPr/>
+            <p:nvPr/>
+          </p:nvSpPr>
+          <p:spPr>
+            <a:xfrm>
+              <a:off x="1204893" y="4397919"/>
+              <a:ext cx="731520" cy="731520"/>
+            </a:xfrm>
+            <a:prstGeom prst="ellipse">
+              <a:avLst/>
+            </a:prstGeom>
+            <a:solidFill>
+              <a:srgbClr val="477BAB"/>
+            </a:solidFill>
+            <a:ln/>
+          </p:spPr>
+        </p:sp>
+        <p:sp>
+          <p:nvSpPr>
+            <p:cNvPr id="37" name="Text 5">
+              <a:extLst>
+                <a:ext uri="{FF2B5EF4-FFF2-40B4-BE49-F238E27FC236}">
+                  <a16:creationId xmlns:a16="http://schemas.microsoft.com/office/drawing/2014/main" id="{D8BAC715-A06E-A9D8-DFC8-C936B4530E17}"/>
+                </a:ext>
+              </a:extLst>
+            </p:cNvPr>
+            <p:cNvSpPr/>
+            <p:nvPr/>
+          </p:nvSpPr>
+          <p:spPr>
+            <a:xfrm>
+              <a:off x="1350861" y="4423034"/>
+              <a:ext cx="573176" cy="681290"/>
+            </a:xfrm>
+            <a:prstGeom prst="rect">
+              <a:avLst/>
+            </a:prstGeom>
+            <a:noFill/>
+            <a:ln/>
+          </p:spPr>
+          <p:txBody>
+            <a:bodyPr wrap="square" rtlCol="0" anchor="ctr"/>
+            <a:lstStyle/>
+            <a:p>
+              <a:r>
+                <a:rPr lang="en-US" sz="2800" b="1" dirty="0">
+                  <a:solidFill>
+                    <a:srgbClr val="EAF4F4"/>
+                  </a:solidFill>
+                  <a:latin typeface="Arial" panose="020B0604020202020204" pitchFamily="34" charset="0"/>
+                  <a:cs typeface="Arial" panose="020B0604020202020204" pitchFamily="34" charset="0"/>
+                </a:rPr>
+                <a:t>3</a:t>
+              </a:r>
+              <a:endParaRPr lang="en-NG" sz="2800" b="1" dirty="0">
+                <a:solidFill>
+                  <a:srgbClr val="EAF4F4"/>
+                </a:solidFill>
+                <a:latin typeface="Arial" panose="020B0604020202020204" pitchFamily="34" charset="0"/>
+                <a:cs typeface="Arial" panose="020B0604020202020204" pitchFamily="34" charset="0"/>
+              </a:endParaRPr>
+            </a:p>
+          </p:txBody>
+        </p:sp>
+      </p:grpSp>
       <p:sp>
         <p:nvSpPr>
-          <p:cNvPr id="34" name="Text 5">
+          <p:cNvPr id="8" name="Rectangle 7">
             <a:extLst>
               <a:ext uri="{FF2B5EF4-FFF2-40B4-BE49-F238E27FC236}">
-                <a16:creationId xmlns:a16="http://schemas.microsoft.com/office/drawing/2014/main" id="{651ECCFB-CDA3-95AA-2901-04A27902365C}"/>
+                <a16:creationId xmlns:a16="http://schemas.microsoft.com/office/drawing/2014/main" id="{31C22112-CBE6-301E-2CF7-69AB005BD3E2}"/>
               </a:ext>
             </a:extLst>
           </p:cNvPr>
@@ -26385,8 +27802,308 @@
         </p:nvSpPr>
         <p:spPr>
           <a:xfrm>
-            <a:off x="1363237" y="2845482"/>
-            <a:ext cx="573176" cy="681290"/>
+            <a:off x="851120" y="3930638"/>
+            <a:ext cx="10757784" cy="926904"/>
+          </a:xfrm>
+          <a:prstGeom prst="rect">
+            <a:avLst/>
+          </a:prstGeom>
+          <a:solidFill>
+            <a:srgbClr val="EAF4F4">
+              <a:alpha val="40000"/>
+            </a:srgbClr>
+          </a:solidFill>
+          <a:ln w="15875">
+            <a:solidFill>
+              <a:srgbClr val="002060"/>
+            </a:solidFill>
+          </a:ln>
+        </p:spPr>
+        <p:style>
+          <a:lnRef idx="2">
+            <a:schemeClr val="accent1">
+              <a:shade val="15000"/>
+            </a:schemeClr>
+          </a:lnRef>
+          <a:fillRef idx="1">
+            <a:schemeClr val="accent1"/>
+          </a:fillRef>
+          <a:effectRef idx="0">
+            <a:schemeClr val="accent1"/>
+          </a:effectRef>
+          <a:fontRef idx="minor">
+            <a:schemeClr val="lt1"/>
+          </a:fontRef>
+        </p:style>
+        <p:txBody>
+          <a:bodyPr rtlCol="0" anchor="ctr"/>
+          <a:lstStyle/>
+          <a:p>
+            <a:pPr algn="ctr"/>
+            <a:endParaRPr lang="en-NG" dirty="0"/>
+          </a:p>
+        </p:txBody>
+      </p:sp>
+      <p:sp>
+        <p:nvSpPr>
+          <p:cNvPr id="11" name="Rectangle 10">
+            <a:extLst>
+              <a:ext uri="{FF2B5EF4-FFF2-40B4-BE49-F238E27FC236}">
+                <a16:creationId xmlns:a16="http://schemas.microsoft.com/office/drawing/2014/main" id="{2C3926D2-8FE6-D33F-61F6-DA00590CF7ED}"/>
+              </a:ext>
+            </a:extLst>
+          </p:cNvPr>
+          <p:cNvSpPr/>
+          <p:nvPr/>
+        </p:nvSpPr>
+        <p:spPr>
+          <a:xfrm>
+            <a:off x="851120" y="5022575"/>
+            <a:ext cx="10757784" cy="926904"/>
+          </a:xfrm>
+          <a:prstGeom prst="rect">
+            <a:avLst/>
+          </a:prstGeom>
+          <a:solidFill>
+            <a:srgbClr val="EAF4F4">
+              <a:alpha val="40000"/>
+            </a:srgbClr>
+          </a:solidFill>
+          <a:ln w="15875">
+            <a:solidFill>
+              <a:srgbClr val="002060"/>
+            </a:solidFill>
+          </a:ln>
+        </p:spPr>
+        <p:style>
+          <a:lnRef idx="2">
+            <a:schemeClr val="accent1">
+              <a:shade val="15000"/>
+            </a:schemeClr>
+          </a:lnRef>
+          <a:fillRef idx="1">
+            <a:schemeClr val="accent1"/>
+          </a:fillRef>
+          <a:effectRef idx="0">
+            <a:schemeClr val="accent1"/>
+          </a:effectRef>
+          <a:fontRef idx="minor">
+            <a:schemeClr val="lt1"/>
+          </a:fontRef>
+        </p:style>
+        <p:txBody>
+          <a:bodyPr rtlCol="0" anchor="ctr"/>
+          <a:lstStyle/>
+          <a:p>
+            <a:pPr algn="ctr"/>
+            <a:endParaRPr lang="en-NG" dirty="0"/>
+          </a:p>
+        </p:txBody>
+      </p:sp>
+      <p:grpSp>
+        <p:nvGrpSpPr>
+          <p:cNvPr id="15" name="Group 14">
+            <a:extLst>
+              <a:ext uri="{FF2B5EF4-FFF2-40B4-BE49-F238E27FC236}">
+                <a16:creationId xmlns:a16="http://schemas.microsoft.com/office/drawing/2014/main" id="{FD95DAAE-C478-2827-06E5-FE4D3E143B0F}"/>
+              </a:ext>
+            </a:extLst>
+          </p:cNvPr>
+          <p:cNvGrpSpPr/>
+          <p:nvPr/>
+        </p:nvGrpSpPr>
+        <p:grpSpPr>
+          <a:xfrm>
+            <a:off x="1174594" y="4095492"/>
+            <a:ext cx="573176" cy="597195"/>
+            <a:chOff x="1204893" y="4397919"/>
+            <a:chExt cx="731520" cy="731520"/>
+          </a:xfrm>
+        </p:grpSpPr>
+        <p:sp>
+          <p:nvSpPr>
+            <p:cNvPr id="16" name="Shape 7">
+              <a:extLst>
+                <a:ext uri="{FF2B5EF4-FFF2-40B4-BE49-F238E27FC236}">
+                  <a16:creationId xmlns:a16="http://schemas.microsoft.com/office/drawing/2014/main" id="{942AD0E3-E2F0-2CC4-EECA-A243D0CE5558}"/>
+                </a:ext>
+              </a:extLst>
+            </p:cNvPr>
+            <p:cNvSpPr/>
+            <p:nvPr/>
+          </p:nvSpPr>
+          <p:spPr>
+            <a:xfrm>
+              <a:off x="1204893" y="4397919"/>
+              <a:ext cx="731520" cy="731520"/>
+            </a:xfrm>
+            <a:prstGeom prst="ellipse">
+              <a:avLst/>
+            </a:prstGeom>
+            <a:solidFill>
+              <a:srgbClr val="477BAB"/>
+            </a:solidFill>
+            <a:ln/>
+          </p:spPr>
+        </p:sp>
+        <p:sp>
+          <p:nvSpPr>
+            <p:cNvPr id="18" name="Text 5">
+              <a:extLst>
+                <a:ext uri="{FF2B5EF4-FFF2-40B4-BE49-F238E27FC236}">
+                  <a16:creationId xmlns:a16="http://schemas.microsoft.com/office/drawing/2014/main" id="{05927D37-94D3-B27B-2928-CFDAC89AD77A}"/>
+                </a:ext>
+              </a:extLst>
+            </p:cNvPr>
+            <p:cNvSpPr/>
+            <p:nvPr/>
+          </p:nvSpPr>
+          <p:spPr>
+            <a:xfrm>
+              <a:off x="1350861" y="4423034"/>
+              <a:ext cx="573176" cy="681290"/>
+            </a:xfrm>
+            <a:prstGeom prst="rect">
+              <a:avLst/>
+            </a:prstGeom>
+            <a:noFill/>
+            <a:ln/>
+          </p:spPr>
+          <p:txBody>
+            <a:bodyPr wrap="square" rtlCol="0" anchor="ctr"/>
+            <a:lstStyle/>
+            <a:p>
+              <a:r>
+                <a:rPr lang="en-US" sz="2800" b="1" dirty="0">
+                  <a:solidFill>
+                    <a:srgbClr val="EAF4F4"/>
+                  </a:solidFill>
+                  <a:latin typeface="Arial" panose="020B0604020202020204" pitchFamily="34" charset="0"/>
+                  <a:cs typeface="Arial" panose="020B0604020202020204" pitchFamily="34" charset="0"/>
+                </a:rPr>
+                <a:t>4</a:t>
+              </a:r>
+              <a:endParaRPr lang="en-NG" sz="2800" b="1" dirty="0">
+                <a:solidFill>
+                  <a:srgbClr val="EAF4F4"/>
+                </a:solidFill>
+                <a:latin typeface="Arial" panose="020B0604020202020204" pitchFamily="34" charset="0"/>
+                <a:cs typeface="Arial" panose="020B0604020202020204" pitchFamily="34" charset="0"/>
+              </a:endParaRPr>
+            </a:p>
+          </p:txBody>
+        </p:sp>
+      </p:grpSp>
+      <p:grpSp>
+        <p:nvGrpSpPr>
+          <p:cNvPr id="20" name="Group 19">
+            <a:extLst>
+              <a:ext uri="{FF2B5EF4-FFF2-40B4-BE49-F238E27FC236}">
+                <a16:creationId xmlns:a16="http://schemas.microsoft.com/office/drawing/2014/main" id="{558A315F-ED27-DD33-ABEE-596001E37451}"/>
+              </a:ext>
+            </a:extLst>
+          </p:cNvPr>
+          <p:cNvGrpSpPr/>
+          <p:nvPr/>
+        </p:nvGrpSpPr>
+        <p:grpSpPr>
+          <a:xfrm>
+            <a:off x="1184004" y="5187429"/>
+            <a:ext cx="573176" cy="597195"/>
+            <a:chOff x="1204893" y="4397919"/>
+            <a:chExt cx="731520" cy="731520"/>
+          </a:xfrm>
+        </p:grpSpPr>
+        <p:sp>
+          <p:nvSpPr>
+            <p:cNvPr id="21" name="Shape 7">
+              <a:extLst>
+                <a:ext uri="{FF2B5EF4-FFF2-40B4-BE49-F238E27FC236}">
+                  <a16:creationId xmlns:a16="http://schemas.microsoft.com/office/drawing/2014/main" id="{90C24017-A3B8-2DFB-0926-EA9CB1698408}"/>
+                </a:ext>
+              </a:extLst>
+            </p:cNvPr>
+            <p:cNvSpPr/>
+            <p:nvPr/>
+          </p:nvSpPr>
+          <p:spPr>
+            <a:xfrm>
+              <a:off x="1204893" y="4397919"/>
+              <a:ext cx="731520" cy="731520"/>
+            </a:xfrm>
+            <a:prstGeom prst="ellipse">
+              <a:avLst/>
+            </a:prstGeom>
+            <a:solidFill>
+              <a:srgbClr val="477BAB"/>
+            </a:solidFill>
+            <a:ln/>
+          </p:spPr>
+        </p:sp>
+        <p:sp>
+          <p:nvSpPr>
+            <p:cNvPr id="23" name="Text 5">
+              <a:extLst>
+                <a:ext uri="{FF2B5EF4-FFF2-40B4-BE49-F238E27FC236}">
+                  <a16:creationId xmlns:a16="http://schemas.microsoft.com/office/drawing/2014/main" id="{1A1F1B0B-566A-9488-B464-7A1A43D3576F}"/>
+                </a:ext>
+              </a:extLst>
+            </p:cNvPr>
+            <p:cNvSpPr/>
+            <p:nvPr/>
+          </p:nvSpPr>
+          <p:spPr>
+            <a:xfrm>
+              <a:off x="1350861" y="4423034"/>
+              <a:ext cx="573176" cy="681290"/>
+            </a:xfrm>
+            <a:prstGeom prst="rect">
+              <a:avLst/>
+            </a:prstGeom>
+            <a:noFill/>
+            <a:ln/>
+          </p:spPr>
+          <p:txBody>
+            <a:bodyPr wrap="square" rtlCol="0" anchor="ctr"/>
+            <a:lstStyle/>
+            <a:p>
+              <a:r>
+                <a:rPr lang="en-US" sz="2800" b="1" dirty="0">
+                  <a:solidFill>
+                    <a:srgbClr val="EAF4F4"/>
+                  </a:solidFill>
+                  <a:latin typeface="Arial" panose="020B0604020202020204" pitchFamily="34" charset="0"/>
+                  <a:cs typeface="Arial" panose="020B0604020202020204" pitchFamily="34" charset="0"/>
+                </a:rPr>
+                <a:t>5</a:t>
+              </a:r>
+              <a:endParaRPr lang="en-NG" sz="2800" b="1" dirty="0">
+                <a:solidFill>
+                  <a:srgbClr val="EAF4F4"/>
+                </a:solidFill>
+                <a:latin typeface="Arial" panose="020B0604020202020204" pitchFamily="34" charset="0"/>
+                <a:cs typeface="Arial" panose="020B0604020202020204" pitchFamily="34" charset="0"/>
+              </a:endParaRPr>
+            </a:p>
+          </p:txBody>
+        </p:sp>
+      </p:grpSp>
+      <p:sp>
+        <p:nvSpPr>
+          <p:cNvPr id="30" name="Text 9">
+            <a:extLst>
+              <a:ext uri="{FF2B5EF4-FFF2-40B4-BE49-F238E27FC236}">
+                <a16:creationId xmlns:a16="http://schemas.microsoft.com/office/drawing/2014/main" id="{E213D661-FF5A-C782-911B-92F8CA411BED}"/>
+              </a:ext>
+            </a:extLst>
+          </p:cNvPr>
+          <p:cNvSpPr/>
+          <p:nvPr/>
+        </p:nvSpPr>
+        <p:spPr>
+          <a:xfrm>
+            <a:off x="2060820" y="4025623"/>
+            <a:ext cx="8869680" cy="845969"/>
           </a:xfrm>
           <a:prstGeom prst="rect">
             <a:avLst/>
@@ -26398,32 +28115,30 @@
           <a:bodyPr wrap="square" rtlCol="0" anchor="ctr"/>
           <a:lstStyle/>
           <a:p>
+            <a:pPr>
+              <a:lnSpc>
+                <a:spcPct val="125000"/>
+              </a:lnSpc>
+            </a:pPr>
             <a:r>
-              <a:rPr lang="en-US" sz="2800" b="1" dirty="0">
-                <a:solidFill>
-                  <a:srgbClr val="EAF4F4"/>
+              <a:rPr lang="en-US" dirty="0">
+                <a:solidFill>
+                  <a:srgbClr val="477BAB"/>
                 </a:solidFill>
                 <a:latin typeface="Arial" panose="020B0604020202020204" pitchFamily="34" charset="0"/>
                 <a:cs typeface="Arial" panose="020B0604020202020204" pitchFamily="34" charset="0"/>
               </a:rPr>
-              <a:t>2</a:t>
+              <a:t>Compared with the relationship between tenure and service adoption, the correlation involving Senior Citizen is relatively weak.</a:t>
             </a:r>
-            <a:endParaRPr lang="en-NG" sz="2800" b="1" dirty="0">
-              <a:solidFill>
-                <a:srgbClr val="EAF4F4"/>
-              </a:solidFill>
-              <a:latin typeface="Arial" panose="020B0604020202020204" pitchFamily="34" charset="0"/>
-              <a:cs typeface="Arial" panose="020B0604020202020204" pitchFamily="34" charset="0"/>
-            </a:endParaRPr>
           </a:p>
         </p:txBody>
       </p:sp>
       <p:sp>
         <p:nvSpPr>
-          <p:cNvPr id="37" name="Text 5">
+          <p:cNvPr id="33" name="Text 9">
             <a:extLst>
               <a:ext uri="{FF2B5EF4-FFF2-40B4-BE49-F238E27FC236}">
-                <a16:creationId xmlns:a16="http://schemas.microsoft.com/office/drawing/2014/main" id="{D8BAC715-A06E-A9D8-DFC8-C936B4530E17}"/>
+                <a16:creationId xmlns:a16="http://schemas.microsoft.com/office/drawing/2014/main" id="{34F2CC16-C639-D411-A217-9DDFDD4E9DA2}"/>
               </a:ext>
             </a:extLst>
           </p:cNvPr>
@@ -26432,8 +28147,8 @@
         </p:nvSpPr>
         <p:spPr>
           <a:xfrm>
-            <a:off x="1350861" y="4423034"/>
-            <a:ext cx="573176" cy="681290"/>
+            <a:off x="2023944" y="5062062"/>
+            <a:ext cx="8869680" cy="845969"/>
           </a:xfrm>
           <a:prstGeom prst="rect">
             <a:avLst/>
@@ -26445,23 +28160,21 @@
           <a:bodyPr wrap="square" rtlCol="0" anchor="ctr"/>
           <a:lstStyle/>
           <a:p>
+            <a:pPr>
+              <a:lnSpc>
+                <a:spcPct val="125000"/>
+              </a:lnSpc>
+            </a:pPr>
             <a:r>
-              <a:rPr lang="en-US" sz="2800" b="1" dirty="0">
-                <a:solidFill>
-                  <a:srgbClr val="EAF4F4"/>
+              <a:rPr lang="en-US" dirty="0">
+                <a:solidFill>
+                  <a:srgbClr val="477BAB"/>
                 </a:solidFill>
                 <a:latin typeface="Arial" panose="020B0604020202020204" pitchFamily="34" charset="0"/>
                 <a:cs typeface="Arial" panose="020B0604020202020204" pitchFamily="34" charset="0"/>
               </a:rPr>
-              <a:t>3</a:t>
+              <a:t>Monthly charges should be considered alongside factors such as contract type and tenure rather than treated as an isolated cause of churn.</a:t>
             </a:r>
-            <a:endParaRPr lang="en-NG" sz="2800" b="1" dirty="0">
-              <a:solidFill>
-                <a:srgbClr val="EAF4F4"/>
-              </a:solidFill>
-              <a:latin typeface="Arial" panose="020B0604020202020204" pitchFamily="34" charset="0"/>
-              <a:cs typeface="Arial" panose="020B0604020202020204" pitchFamily="34" charset="0"/>
-            </a:endParaRPr>
           </a:p>
         </p:txBody>
       </p:sp>
@@ -26496,7 +28209,7 @@
         <p:cNvPr id="1" name="">
           <a:extLst>
             <a:ext uri="{FF2B5EF4-FFF2-40B4-BE49-F238E27FC236}">
-              <a16:creationId xmlns:a16="http://schemas.microsoft.com/office/drawing/2014/main" id="{F7A38D55-3095-50FC-8011-0C745A6210FA}"/>
+              <a16:creationId xmlns:a16="http://schemas.microsoft.com/office/drawing/2014/main" id="{73AA9579-8FBB-907D-9518-6F62D5B250FD}"/>
             </a:ext>
           </a:extLst>
         </p:cNvPr>
@@ -26513,10 +28226,10 @@
       </p:grpSpPr>
       <p:sp>
         <p:nvSpPr>
-          <p:cNvPr id="6" name="Text 1">
+          <p:cNvPr id="11" name="Rectangle 10">
             <a:extLst>
               <a:ext uri="{FF2B5EF4-FFF2-40B4-BE49-F238E27FC236}">
-                <a16:creationId xmlns:a16="http://schemas.microsoft.com/office/drawing/2014/main" id="{2C1B3ADB-8AA4-4D80-A5B4-A3A014C08FE9}"/>
+                <a16:creationId xmlns:a16="http://schemas.microsoft.com/office/drawing/2014/main" id="{138DF9A3-FFE8-FAB9-913C-6640065C50EF}"/>
               </a:ext>
             </a:extLst>
           </p:cNvPr>
@@ -26525,8 +28238,119 @@
         </p:nvSpPr>
         <p:spPr>
           <a:xfrm>
-            <a:off x="793806" y="659240"/>
-            <a:ext cx="2704768" cy="640080"/>
+            <a:off x="734854" y="797242"/>
+            <a:ext cx="3552866" cy="681290"/>
+          </a:xfrm>
+          <a:prstGeom prst="rect">
+            <a:avLst/>
+          </a:prstGeom>
+          <a:solidFill>
+            <a:srgbClr val="FF0000">
+              <a:alpha val="78000"/>
+            </a:srgbClr>
+          </a:solidFill>
+          <a:ln w="15875">
+            <a:solidFill>
+              <a:srgbClr val="002060"/>
+            </a:solidFill>
+          </a:ln>
+        </p:spPr>
+        <p:style>
+          <a:lnRef idx="2">
+            <a:schemeClr val="accent1">
+              <a:shade val="15000"/>
+            </a:schemeClr>
+          </a:lnRef>
+          <a:fillRef idx="1">
+            <a:schemeClr val="accent1"/>
+          </a:fillRef>
+          <a:effectRef idx="0">
+            <a:schemeClr val="accent1"/>
+          </a:effectRef>
+          <a:fontRef idx="minor">
+            <a:schemeClr val="lt1"/>
+          </a:fontRef>
+        </p:style>
+        <p:txBody>
+          <a:bodyPr rtlCol="0" anchor="ctr"/>
+          <a:lstStyle/>
+          <a:p>
+            <a:pPr algn="ctr"/>
+            <a:endParaRPr lang="en-NG" dirty="0">
+              <a:solidFill>
+                <a:srgbClr val="FF0000"/>
+              </a:solidFill>
+              <a:highlight>
+                <a:srgbClr val="FF0000"/>
+              </a:highlight>
+            </a:endParaRPr>
+          </a:p>
+        </p:txBody>
+      </p:sp>
+      <p:sp>
+        <p:nvSpPr>
+          <p:cNvPr id="3" name="Subtitle 2">
+            <a:extLst>
+              <a:ext uri="{FF2B5EF4-FFF2-40B4-BE49-F238E27FC236}">
+                <a16:creationId xmlns:a16="http://schemas.microsoft.com/office/drawing/2014/main" id="{A3975957-DFA4-0DED-4809-21392954D16A}"/>
+              </a:ext>
+            </a:extLst>
+          </p:cNvPr>
+          <p:cNvSpPr>
+            <a:spLocks noGrp="1"/>
+          </p:cNvSpPr>
+          <p:nvPr>
+            <p:ph type="subTitle" idx="1"/>
+          </p:nvPr>
+        </p:nvSpPr>
+        <p:spPr>
+          <a:xfrm>
+            <a:off x="740838" y="284514"/>
+            <a:ext cx="2713715" cy="498420"/>
+          </a:xfrm>
+        </p:spPr>
+        <p:txBody>
+          <a:bodyPr>
+            <a:normAutofit fontScale="77500" lnSpcReduction="20000"/>
+          </a:bodyPr>
+          <a:lstStyle/>
+          <a:p>
+            <a:r>
+              <a:rPr lang="en-US" b="1" dirty="0">
+                <a:solidFill>
+                  <a:srgbClr val="477BAB"/>
+                </a:solidFill>
+                <a:latin typeface="Arial" panose="020B0604020202020204" pitchFamily="34" charset="0"/>
+                <a:cs typeface="Arial" panose="020B0604020202020204" pitchFamily="34" charset="0"/>
+              </a:rPr>
+              <a:t>Risk and Opportunity</a:t>
+            </a:r>
+            <a:endParaRPr lang="en-NG" b="1" dirty="0">
+              <a:solidFill>
+                <a:srgbClr val="477BAB"/>
+              </a:solidFill>
+              <a:latin typeface="Arial" panose="020B0604020202020204" pitchFamily="34" charset="0"/>
+              <a:cs typeface="Arial" panose="020B0604020202020204" pitchFamily="34" charset="0"/>
+            </a:endParaRPr>
+          </a:p>
+        </p:txBody>
+      </p:sp>
+      <p:sp>
+        <p:nvSpPr>
+          <p:cNvPr id="33" name="Text 9">
+            <a:extLst>
+              <a:ext uri="{FF2B5EF4-FFF2-40B4-BE49-F238E27FC236}">
+                <a16:creationId xmlns:a16="http://schemas.microsoft.com/office/drawing/2014/main" id="{3B6E266B-7DE2-8048-21B9-A2F1BEDA5DBF}"/>
+              </a:ext>
+            </a:extLst>
+          </p:cNvPr>
+          <p:cNvSpPr/>
+          <p:nvPr/>
+        </p:nvSpPr>
+        <p:spPr>
+          <a:xfrm>
+            <a:off x="1921565" y="782934"/>
+            <a:ext cx="1179444" cy="681290"/>
           </a:xfrm>
           <a:prstGeom prst="rect">
             <a:avLst/>
@@ -26538,21 +28362,541 @@
           <a:bodyPr wrap="square" rtlCol="0" anchor="ctr"/>
           <a:lstStyle/>
           <a:p>
-            <a:pPr marL="0" indent="0">
-              <a:buNone/>
+            <a:pPr>
+              <a:lnSpc>
+                <a:spcPct val="125000"/>
+              </a:lnSpc>
             </a:pPr>
             <a:r>
-              <a:rPr lang="en-US" sz="2000" b="1" dirty="0">
-                <a:solidFill>
-                  <a:srgbClr val="477BAB"/>
+              <a:rPr lang="en-US" dirty="0">
+                <a:solidFill>
+                  <a:schemeClr val="bg1"/>
                 </a:solidFill>
                 <a:latin typeface="Arial" panose="020B0604020202020204" pitchFamily="34" charset="0"/>
-                <a:ea typeface="Cambria" pitchFamily="34" charset="-122"/>
                 <a:cs typeface="Arial" panose="020B0604020202020204" pitchFamily="34" charset="0"/>
               </a:rPr>
-              <a:t>Recommendations</a:t>
+              <a:t>Risk</a:t>
             </a:r>
-            <a:endParaRPr lang="en-US" sz="2000" b="1" dirty="0">
+          </a:p>
+        </p:txBody>
+      </p:sp>
+      <p:sp>
+        <p:nvSpPr>
+          <p:cNvPr id="10" name="Rectangle 9">
+            <a:extLst>
+              <a:ext uri="{FF2B5EF4-FFF2-40B4-BE49-F238E27FC236}">
+                <a16:creationId xmlns:a16="http://schemas.microsoft.com/office/drawing/2014/main" id="{FDB51D29-6419-29DF-D8B1-1F74A779A2F7}"/>
+              </a:ext>
+            </a:extLst>
+          </p:cNvPr>
+          <p:cNvSpPr/>
+          <p:nvPr/>
+        </p:nvSpPr>
+        <p:spPr>
+          <a:xfrm>
+            <a:off x="6961016" y="797242"/>
+            <a:ext cx="3552866" cy="681290"/>
+          </a:xfrm>
+          <a:prstGeom prst="rect">
+            <a:avLst/>
+          </a:prstGeom>
+          <a:solidFill>
+            <a:srgbClr val="477BAB"/>
+          </a:solidFill>
+          <a:ln w="15875">
+            <a:solidFill>
+              <a:srgbClr val="002060"/>
+            </a:solidFill>
+          </a:ln>
+        </p:spPr>
+        <p:style>
+          <a:lnRef idx="2">
+            <a:schemeClr val="accent1">
+              <a:shade val="15000"/>
+            </a:schemeClr>
+          </a:lnRef>
+          <a:fillRef idx="1">
+            <a:schemeClr val="accent1"/>
+          </a:fillRef>
+          <a:effectRef idx="0">
+            <a:schemeClr val="accent1"/>
+          </a:effectRef>
+          <a:fontRef idx="minor">
+            <a:schemeClr val="lt1"/>
+          </a:fontRef>
+        </p:style>
+        <p:txBody>
+          <a:bodyPr rtlCol="0" anchor="ctr"/>
+          <a:lstStyle/>
+          <a:p>
+            <a:pPr algn="ctr"/>
+            <a:endParaRPr lang="en-NG" dirty="0"/>
+          </a:p>
+        </p:txBody>
+      </p:sp>
+      <p:sp>
+        <p:nvSpPr>
+          <p:cNvPr id="14" name="Text 9">
+            <a:extLst>
+              <a:ext uri="{FF2B5EF4-FFF2-40B4-BE49-F238E27FC236}">
+                <a16:creationId xmlns:a16="http://schemas.microsoft.com/office/drawing/2014/main" id="{69F96B97-F0A2-9FD3-7453-304080E90A2A}"/>
+              </a:ext>
+            </a:extLst>
+          </p:cNvPr>
+          <p:cNvSpPr/>
+          <p:nvPr/>
+        </p:nvSpPr>
+        <p:spPr>
+          <a:xfrm>
+            <a:off x="8152758" y="797242"/>
+            <a:ext cx="1517375" cy="681290"/>
+          </a:xfrm>
+          <a:prstGeom prst="rect">
+            <a:avLst/>
+          </a:prstGeom>
+          <a:noFill/>
+          <a:ln/>
+        </p:spPr>
+        <p:txBody>
+          <a:bodyPr wrap="square" rtlCol="0" anchor="ctr"/>
+          <a:lstStyle/>
+          <a:p>
+            <a:pPr>
+              <a:lnSpc>
+                <a:spcPct val="125000"/>
+              </a:lnSpc>
+            </a:pPr>
+            <a:r>
+              <a:rPr lang="en-US" dirty="0">
+                <a:solidFill>
+                  <a:srgbClr val="EAF4F4"/>
+                </a:solidFill>
+                <a:latin typeface="Arial" panose="020B0604020202020204" pitchFamily="34" charset="0"/>
+                <a:cs typeface="Arial" panose="020B0604020202020204" pitchFamily="34" charset="0"/>
+              </a:rPr>
+              <a:t>Opportunity</a:t>
+            </a:r>
+          </a:p>
+        </p:txBody>
+      </p:sp>
+      <p:sp>
+        <p:nvSpPr>
+          <p:cNvPr id="26" name="Shape 28">
+            <a:extLst>
+              <a:ext uri="{FF2B5EF4-FFF2-40B4-BE49-F238E27FC236}">
+                <a16:creationId xmlns:a16="http://schemas.microsoft.com/office/drawing/2014/main" id="{DDFBCEDE-90A1-A50A-9E0B-D201F1E4BD3C}"/>
+              </a:ext>
+            </a:extLst>
+          </p:cNvPr>
+          <p:cNvSpPr/>
+          <p:nvPr/>
+        </p:nvSpPr>
+        <p:spPr>
+          <a:xfrm>
+            <a:off x="5774305" y="1478532"/>
+            <a:ext cx="96408" cy="5107798"/>
+          </a:xfrm>
+          <a:prstGeom prst="rect">
+            <a:avLst/>
+          </a:prstGeom>
+          <a:solidFill>
+            <a:srgbClr val="0070C0"/>
+          </a:solidFill>
+          <a:ln/>
+        </p:spPr>
+      </p:sp>
+      <p:sp>
+        <p:nvSpPr>
+          <p:cNvPr id="28" name="Rectangle 27">
+            <a:extLst>
+              <a:ext uri="{FF2B5EF4-FFF2-40B4-BE49-F238E27FC236}">
+                <a16:creationId xmlns:a16="http://schemas.microsoft.com/office/drawing/2014/main" id="{45BA927E-B0E7-1910-987D-C52A4271DD48}"/>
+              </a:ext>
+            </a:extLst>
+          </p:cNvPr>
+          <p:cNvSpPr/>
+          <p:nvPr/>
+        </p:nvSpPr>
+        <p:spPr>
+          <a:xfrm>
+            <a:off x="241520" y="1806354"/>
+            <a:ext cx="5350897" cy="1241646"/>
+          </a:xfrm>
+          <a:prstGeom prst="rect">
+            <a:avLst/>
+          </a:prstGeom>
+          <a:solidFill>
+            <a:srgbClr val="EAF4F4">
+              <a:alpha val="40000"/>
+            </a:srgbClr>
+          </a:solidFill>
+          <a:ln w="15875">
+            <a:solidFill>
+              <a:srgbClr val="002060"/>
+            </a:solidFill>
+          </a:ln>
+        </p:spPr>
+        <p:style>
+          <a:lnRef idx="2">
+            <a:schemeClr val="accent1">
+              <a:shade val="15000"/>
+            </a:schemeClr>
+          </a:lnRef>
+          <a:fillRef idx="1">
+            <a:schemeClr val="accent1"/>
+          </a:fillRef>
+          <a:effectRef idx="0">
+            <a:schemeClr val="accent1"/>
+          </a:effectRef>
+          <a:fontRef idx="minor">
+            <a:schemeClr val="lt1"/>
+          </a:fontRef>
+        </p:style>
+        <p:txBody>
+          <a:bodyPr rtlCol="0" anchor="ctr"/>
+          <a:lstStyle/>
+          <a:p>
+            <a:pPr algn="ctr"/>
+            <a:endParaRPr lang="en-NG" dirty="0"/>
+          </a:p>
+        </p:txBody>
+      </p:sp>
+      <p:sp>
+        <p:nvSpPr>
+          <p:cNvPr id="35" name="Rectangle 34">
+            <a:extLst>
+              <a:ext uri="{FF2B5EF4-FFF2-40B4-BE49-F238E27FC236}">
+                <a16:creationId xmlns:a16="http://schemas.microsoft.com/office/drawing/2014/main" id="{132E9897-D1BC-66B3-9FB4-2A134E02C049}"/>
+              </a:ext>
+            </a:extLst>
+          </p:cNvPr>
+          <p:cNvSpPr/>
+          <p:nvPr/>
+        </p:nvSpPr>
+        <p:spPr>
+          <a:xfrm>
+            <a:off x="241518" y="3375822"/>
+            <a:ext cx="5350897" cy="1241646"/>
+          </a:xfrm>
+          <a:prstGeom prst="rect">
+            <a:avLst/>
+          </a:prstGeom>
+          <a:solidFill>
+            <a:srgbClr val="EAF4F4">
+              <a:alpha val="40000"/>
+            </a:srgbClr>
+          </a:solidFill>
+          <a:ln w="15875">
+            <a:solidFill>
+              <a:srgbClr val="002060"/>
+            </a:solidFill>
+          </a:ln>
+        </p:spPr>
+        <p:style>
+          <a:lnRef idx="2">
+            <a:schemeClr val="accent1">
+              <a:shade val="15000"/>
+            </a:schemeClr>
+          </a:lnRef>
+          <a:fillRef idx="1">
+            <a:schemeClr val="accent1"/>
+          </a:fillRef>
+          <a:effectRef idx="0">
+            <a:schemeClr val="accent1"/>
+          </a:effectRef>
+          <a:fontRef idx="minor">
+            <a:schemeClr val="lt1"/>
+          </a:fontRef>
+        </p:style>
+        <p:txBody>
+          <a:bodyPr rtlCol="0" anchor="ctr"/>
+          <a:lstStyle/>
+          <a:p>
+            <a:pPr algn="ctr"/>
+            <a:endParaRPr lang="en-NG" dirty="0"/>
+          </a:p>
+        </p:txBody>
+      </p:sp>
+      <p:sp>
+        <p:nvSpPr>
+          <p:cNvPr id="38" name="Rectangle 37">
+            <a:extLst>
+              <a:ext uri="{FF2B5EF4-FFF2-40B4-BE49-F238E27FC236}">
+                <a16:creationId xmlns:a16="http://schemas.microsoft.com/office/drawing/2014/main" id="{127DEA3E-7463-1ADC-D6CD-E683B392C62F}"/>
+              </a:ext>
+            </a:extLst>
+          </p:cNvPr>
+          <p:cNvSpPr/>
+          <p:nvPr/>
+        </p:nvSpPr>
+        <p:spPr>
+          <a:xfrm>
+            <a:off x="241517" y="4823791"/>
+            <a:ext cx="5350897" cy="1363145"/>
+          </a:xfrm>
+          <a:prstGeom prst="rect">
+            <a:avLst/>
+          </a:prstGeom>
+          <a:solidFill>
+            <a:srgbClr val="EAF4F4">
+              <a:alpha val="40000"/>
+            </a:srgbClr>
+          </a:solidFill>
+          <a:ln w="15875">
+            <a:solidFill>
+              <a:srgbClr val="002060"/>
+            </a:solidFill>
+          </a:ln>
+        </p:spPr>
+        <p:style>
+          <a:lnRef idx="2">
+            <a:schemeClr val="accent1">
+              <a:shade val="15000"/>
+            </a:schemeClr>
+          </a:lnRef>
+          <a:fillRef idx="1">
+            <a:schemeClr val="accent1"/>
+          </a:fillRef>
+          <a:effectRef idx="0">
+            <a:schemeClr val="accent1"/>
+          </a:effectRef>
+          <a:fontRef idx="minor">
+            <a:schemeClr val="lt1"/>
+          </a:fontRef>
+        </p:style>
+        <p:txBody>
+          <a:bodyPr rtlCol="0" anchor="ctr"/>
+          <a:lstStyle/>
+          <a:p>
+            <a:pPr algn="ctr"/>
+            <a:endParaRPr lang="en-NG" dirty="0"/>
+          </a:p>
+        </p:txBody>
+      </p:sp>
+      <p:sp>
+        <p:nvSpPr>
+          <p:cNvPr id="40" name="Rectangle 39">
+            <a:extLst>
+              <a:ext uri="{FF2B5EF4-FFF2-40B4-BE49-F238E27FC236}">
+                <a16:creationId xmlns:a16="http://schemas.microsoft.com/office/drawing/2014/main" id="{3DA07FB6-F949-2840-BF0E-191A129FCC8A}"/>
+              </a:ext>
+            </a:extLst>
+          </p:cNvPr>
+          <p:cNvSpPr/>
+          <p:nvPr/>
+        </p:nvSpPr>
+        <p:spPr>
+          <a:xfrm>
+            <a:off x="6321289" y="1806354"/>
+            <a:ext cx="5350897" cy="1241646"/>
+          </a:xfrm>
+          <a:prstGeom prst="rect">
+            <a:avLst/>
+          </a:prstGeom>
+          <a:solidFill>
+            <a:srgbClr val="EAF4F4">
+              <a:alpha val="40000"/>
+            </a:srgbClr>
+          </a:solidFill>
+          <a:ln w="15875">
+            <a:solidFill>
+              <a:srgbClr val="002060"/>
+            </a:solidFill>
+          </a:ln>
+        </p:spPr>
+        <p:style>
+          <a:lnRef idx="2">
+            <a:schemeClr val="accent1">
+              <a:shade val="15000"/>
+            </a:schemeClr>
+          </a:lnRef>
+          <a:fillRef idx="1">
+            <a:schemeClr val="accent1"/>
+          </a:fillRef>
+          <a:effectRef idx="0">
+            <a:schemeClr val="accent1"/>
+          </a:effectRef>
+          <a:fontRef idx="minor">
+            <a:schemeClr val="lt1"/>
+          </a:fontRef>
+        </p:style>
+        <p:txBody>
+          <a:bodyPr rtlCol="0" anchor="ctr"/>
+          <a:lstStyle/>
+          <a:p>
+            <a:pPr algn="ctr"/>
+            <a:endParaRPr lang="en-NG" dirty="0"/>
+          </a:p>
+        </p:txBody>
+      </p:sp>
+      <p:sp>
+        <p:nvSpPr>
+          <p:cNvPr id="42" name="Rectangle 41">
+            <a:extLst>
+              <a:ext uri="{FF2B5EF4-FFF2-40B4-BE49-F238E27FC236}">
+                <a16:creationId xmlns:a16="http://schemas.microsoft.com/office/drawing/2014/main" id="{CEC51146-A9A1-823C-5479-0F7064600A5B}"/>
+              </a:ext>
+            </a:extLst>
+          </p:cNvPr>
+          <p:cNvSpPr/>
+          <p:nvPr/>
+        </p:nvSpPr>
+        <p:spPr>
+          <a:xfrm>
+            <a:off x="6321287" y="3375822"/>
+            <a:ext cx="5350897" cy="1241646"/>
+          </a:xfrm>
+          <a:prstGeom prst="rect">
+            <a:avLst/>
+          </a:prstGeom>
+          <a:solidFill>
+            <a:srgbClr val="EAF4F4">
+              <a:alpha val="40000"/>
+            </a:srgbClr>
+          </a:solidFill>
+          <a:ln w="15875">
+            <a:solidFill>
+              <a:srgbClr val="002060"/>
+            </a:solidFill>
+          </a:ln>
+        </p:spPr>
+        <p:style>
+          <a:lnRef idx="2">
+            <a:schemeClr val="accent1">
+              <a:shade val="15000"/>
+            </a:schemeClr>
+          </a:lnRef>
+          <a:fillRef idx="1">
+            <a:schemeClr val="accent1"/>
+          </a:fillRef>
+          <a:effectRef idx="0">
+            <a:schemeClr val="accent1"/>
+          </a:effectRef>
+          <a:fontRef idx="minor">
+            <a:schemeClr val="lt1"/>
+          </a:fontRef>
+        </p:style>
+        <p:txBody>
+          <a:bodyPr rtlCol="0" anchor="ctr"/>
+          <a:lstStyle/>
+          <a:p>
+            <a:pPr algn="ctr"/>
+            <a:endParaRPr lang="en-NG" dirty="0"/>
+          </a:p>
+        </p:txBody>
+      </p:sp>
+      <p:sp>
+        <p:nvSpPr>
+          <p:cNvPr id="44" name="Rectangle 43">
+            <a:extLst>
+              <a:ext uri="{FF2B5EF4-FFF2-40B4-BE49-F238E27FC236}">
+                <a16:creationId xmlns:a16="http://schemas.microsoft.com/office/drawing/2014/main" id="{1E77721E-B458-07B6-FB3E-1BB1D3B84F8A}"/>
+              </a:ext>
+            </a:extLst>
+          </p:cNvPr>
+          <p:cNvSpPr/>
+          <p:nvPr/>
+        </p:nvSpPr>
+        <p:spPr>
+          <a:xfrm>
+            <a:off x="6321286" y="4945290"/>
+            <a:ext cx="5350897" cy="1241646"/>
+          </a:xfrm>
+          <a:prstGeom prst="rect">
+            <a:avLst/>
+          </a:prstGeom>
+          <a:solidFill>
+            <a:srgbClr val="EAF4F4">
+              <a:alpha val="40000"/>
+            </a:srgbClr>
+          </a:solidFill>
+          <a:ln w="15875">
+            <a:solidFill>
+              <a:srgbClr val="002060"/>
+            </a:solidFill>
+          </a:ln>
+        </p:spPr>
+        <p:style>
+          <a:lnRef idx="2">
+            <a:schemeClr val="accent1">
+              <a:shade val="15000"/>
+            </a:schemeClr>
+          </a:lnRef>
+          <a:fillRef idx="1">
+            <a:schemeClr val="accent1"/>
+          </a:fillRef>
+          <a:effectRef idx="0">
+            <a:schemeClr val="accent1"/>
+          </a:effectRef>
+          <a:fontRef idx="minor">
+            <a:schemeClr val="lt1"/>
+          </a:fontRef>
+        </p:style>
+        <p:txBody>
+          <a:bodyPr rtlCol="0" anchor="ctr"/>
+          <a:lstStyle/>
+          <a:p>
+            <a:pPr algn="ctr"/>
+            <a:endParaRPr lang="en-NG" dirty="0"/>
+          </a:p>
+        </p:txBody>
+      </p:sp>
+      <p:sp>
+        <p:nvSpPr>
+          <p:cNvPr id="46" name="Text 9">
+            <a:extLst>
+              <a:ext uri="{FF2B5EF4-FFF2-40B4-BE49-F238E27FC236}">
+                <a16:creationId xmlns:a16="http://schemas.microsoft.com/office/drawing/2014/main" id="{ED3A8781-F0BB-709F-E23D-3D84CC85C3FE}"/>
+              </a:ext>
+            </a:extLst>
+          </p:cNvPr>
+          <p:cNvSpPr/>
+          <p:nvPr/>
+        </p:nvSpPr>
+        <p:spPr>
+          <a:xfrm>
+            <a:off x="352669" y="1806354"/>
+            <a:ext cx="5128591" cy="1241646"/>
+          </a:xfrm>
+          <a:prstGeom prst="rect">
+            <a:avLst/>
+          </a:prstGeom>
+          <a:noFill/>
+          <a:ln/>
+        </p:spPr>
+        <p:txBody>
+          <a:bodyPr wrap="square" rtlCol="0" anchor="ctr"/>
+          <a:lstStyle/>
+          <a:p>
+            <a:pPr>
+              <a:lnSpc>
+                <a:spcPct val="125000"/>
+              </a:lnSpc>
+            </a:pPr>
+            <a:r>
+              <a:rPr lang="en-NG" b="1" dirty="0">
+                <a:solidFill>
+                  <a:srgbClr val="477BAB"/>
+                </a:solidFill>
+              </a:rPr>
+              <a:t>High churn among short-term customers</a:t>
+            </a:r>
+            <a:br>
+              <a:rPr lang="en-NG" dirty="0">
+                <a:solidFill>
+                  <a:srgbClr val="477BAB"/>
+                </a:solidFill>
+              </a:rPr>
+            </a:br>
+            <a:r>
+              <a:rPr lang="en-NG" dirty="0">
+                <a:solidFill>
+                  <a:srgbClr val="477BAB"/>
+                </a:solidFill>
+              </a:rPr>
+              <a:t>Concentrated churn among month-to-month customers is an ongoing revenue-retention risk.</a:t>
+            </a:r>
+            <a:endParaRPr lang="en-US" dirty="0">
               <a:solidFill>
                 <a:srgbClr val="477BAB"/>
               </a:solidFill>
@@ -26564,10 +28908,10 @@
       </p:sp>
       <p:sp>
         <p:nvSpPr>
-          <p:cNvPr id="14" name="Shape 3">
+          <p:cNvPr id="48" name="Text 9">
             <a:extLst>
               <a:ext uri="{FF2B5EF4-FFF2-40B4-BE49-F238E27FC236}">
-                <a16:creationId xmlns:a16="http://schemas.microsoft.com/office/drawing/2014/main" id="{6B15A391-325B-D1E5-CC29-866466AA4734}"/>
+                <a16:creationId xmlns:a16="http://schemas.microsoft.com/office/drawing/2014/main" id="{4602D2C2-A692-27A0-D407-79AC60447E5A}"/>
               </a:ext>
             </a:extLst>
           </p:cNvPr>
@@ -26576,212 +28920,8 @@
         </p:nvSpPr>
         <p:spPr>
           <a:xfrm>
-            <a:off x="825611" y="1531331"/>
-            <a:ext cx="3218688" cy="3931920"/>
-          </a:xfrm>
-          <a:prstGeom prst="roundRect">
-            <a:avLst>
-              <a:gd name="adj" fmla="val 2791"/>
-            </a:avLst>
-          </a:prstGeom>
-          <a:solidFill>
-            <a:srgbClr val="477BAB"/>
-          </a:solidFill>
-          <a:ln/>
-        </p:spPr>
-        <p:txBody>
-          <a:bodyPr/>
-          <a:lstStyle/>
-          <a:p>
-            <a:endParaRPr lang="en-NG" dirty="0"/>
-          </a:p>
-        </p:txBody>
-      </p:sp>
-      <p:sp>
-        <p:nvSpPr>
-          <p:cNvPr id="12" name="Shape 3">
-            <a:extLst>
-              <a:ext uri="{FF2B5EF4-FFF2-40B4-BE49-F238E27FC236}">
-                <a16:creationId xmlns:a16="http://schemas.microsoft.com/office/drawing/2014/main" id="{154B5FDA-A35A-FB39-836C-EDB0889309D5}"/>
-              </a:ext>
-            </a:extLst>
-          </p:cNvPr>
-          <p:cNvSpPr/>
-          <p:nvPr/>
-        </p:nvSpPr>
-        <p:spPr>
-          <a:xfrm>
-            <a:off x="1957877" y="1681645"/>
-            <a:ext cx="694944" cy="694944"/>
-          </a:xfrm>
-          <a:prstGeom prst="ellipse">
-            <a:avLst/>
-          </a:prstGeom>
-          <a:solidFill>
-            <a:srgbClr val="EAF4F4"/>
-          </a:solidFill>
-          <a:ln/>
-        </p:spPr>
-        <p:txBody>
-          <a:bodyPr/>
-          <a:lstStyle/>
-          <a:p>
-            <a:endParaRPr lang="en-NG" dirty="0"/>
-          </a:p>
-        </p:txBody>
-      </p:sp>
-      <p:sp>
-        <p:nvSpPr>
-          <p:cNvPr id="17" name="Shape 3">
-            <a:extLst>
-              <a:ext uri="{FF2B5EF4-FFF2-40B4-BE49-F238E27FC236}">
-                <a16:creationId xmlns:a16="http://schemas.microsoft.com/office/drawing/2014/main" id="{4393BEEC-80FA-2A06-8381-30F3FC803968}"/>
-              </a:ext>
-            </a:extLst>
-          </p:cNvPr>
-          <p:cNvSpPr/>
-          <p:nvPr/>
-        </p:nvSpPr>
-        <p:spPr>
-          <a:xfrm>
-            <a:off x="4593336" y="1531331"/>
-            <a:ext cx="3218688" cy="3931920"/>
-          </a:xfrm>
-          <a:prstGeom prst="roundRect">
-            <a:avLst>
-              <a:gd name="adj" fmla="val 2791"/>
-            </a:avLst>
-          </a:prstGeom>
-          <a:solidFill>
-            <a:srgbClr val="477BAB"/>
-          </a:solidFill>
-          <a:ln/>
-        </p:spPr>
-        <p:txBody>
-          <a:bodyPr/>
-          <a:lstStyle/>
-          <a:p>
-            <a:endParaRPr lang="en-NG" dirty="0"/>
-          </a:p>
-        </p:txBody>
-      </p:sp>
-      <p:sp>
-        <p:nvSpPr>
-          <p:cNvPr id="19" name="Shape 3">
-            <a:extLst>
-              <a:ext uri="{FF2B5EF4-FFF2-40B4-BE49-F238E27FC236}">
-                <a16:creationId xmlns:a16="http://schemas.microsoft.com/office/drawing/2014/main" id="{438F715A-534C-01D2-890D-88AC191E5B55}"/>
-              </a:ext>
-            </a:extLst>
-          </p:cNvPr>
-          <p:cNvSpPr/>
-          <p:nvPr/>
-        </p:nvSpPr>
-        <p:spPr>
-          <a:xfrm>
-            <a:off x="8361061" y="1531331"/>
-            <a:ext cx="3222665" cy="3931920"/>
-          </a:xfrm>
-          <a:prstGeom prst="roundRect">
-            <a:avLst>
-              <a:gd name="adj" fmla="val 2791"/>
-            </a:avLst>
-          </a:prstGeom>
-          <a:solidFill>
-            <a:srgbClr val="477BAB"/>
-          </a:solidFill>
-          <a:ln/>
-        </p:spPr>
-        <p:txBody>
-          <a:bodyPr/>
-          <a:lstStyle/>
-          <a:p>
-            <a:endParaRPr lang="en-NG" dirty="0"/>
-          </a:p>
-        </p:txBody>
-      </p:sp>
-      <p:sp>
-        <p:nvSpPr>
-          <p:cNvPr id="21" name="Shape 3">
-            <a:extLst>
-              <a:ext uri="{FF2B5EF4-FFF2-40B4-BE49-F238E27FC236}">
-                <a16:creationId xmlns:a16="http://schemas.microsoft.com/office/drawing/2014/main" id="{657ED316-A807-42F8-79EB-F543A82AF673}"/>
-              </a:ext>
-            </a:extLst>
-          </p:cNvPr>
-          <p:cNvSpPr/>
-          <p:nvPr/>
-        </p:nvSpPr>
-        <p:spPr>
-          <a:xfrm>
-            <a:off x="5814062" y="1692978"/>
-            <a:ext cx="694944" cy="694944"/>
-          </a:xfrm>
-          <a:prstGeom prst="ellipse">
-            <a:avLst/>
-          </a:prstGeom>
-          <a:solidFill>
-            <a:srgbClr val="EAF4F4"/>
-          </a:solidFill>
-          <a:ln/>
-        </p:spPr>
-        <p:txBody>
-          <a:bodyPr/>
-          <a:lstStyle/>
-          <a:p>
-            <a:endParaRPr lang="en-NG" dirty="0"/>
-          </a:p>
-        </p:txBody>
-      </p:sp>
-      <p:sp>
-        <p:nvSpPr>
-          <p:cNvPr id="23" name="Shape 3">
-            <a:extLst>
-              <a:ext uri="{FF2B5EF4-FFF2-40B4-BE49-F238E27FC236}">
-                <a16:creationId xmlns:a16="http://schemas.microsoft.com/office/drawing/2014/main" id="{234D7558-E659-2FB0-F826-C2F67DA16E93}"/>
-              </a:ext>
-            </a:extLst>
-          </p:cNvPr>
-          <p:cNvSpPr/>
-          <p:nvPr/>
-        </p:nvSpPr>
-        <p:spPr>
-          <a:xfrm>
-            <a:off x="9743529" y="1681645"/>
-            <a:ext cx="694944" cy="694944"/>
-          </a:xfrm>
-          <a:prstGeom prst="ellipse">
-            <a:avLst/>
-          </a:prstGeom>
-          <a:solidFill>
-            <a:srgbClr val="EAF4F4"/>
-          </a:solidFill>
-          <a:ln/>
-        </p:spPr>
-        <p:txBody>
-          <a:bodyPr/>
-          <a:lstStyle/>
-          <a:p>
-            <a:endParaRPr lang="en-NG" dirty="0"/>
-          </a:p>
-        </p:txBody>
-      </p:sp>
-      <p:sp>
-        <p:nvSpPr>
-          <p:cNvPr id="25" name="Text 5">
-            <a:extLst>
-              <a:ext uri="{FF2B5EF4-FFF2-40B4-BE49-F238E27FC236}">
-                <a16:creationId xmlns:a16="http://schemas.microsoft.com/office/drawing/2014/main" id="{ECB6AEAE-EC35-AB9E-C66A-E8DD09F232AD}"/>
-              </a:ext>
-            </a:extLst>
-          </p:cNvPr>
-          <p:cNvSpPr/>
-          <p:nvPr/>
-        </p:nvSpPr>
-        <p:spPr>
-          <a:xfrm>
-            <a:off x="1040495" y="2772568"/>
-            <a:ext cx="2788920" cy="2294704"/>
+            <a:off x="352669" y="3361514"/>
+            <a:ext cx="5128591" cy="1241646"/>
           </a:xfrm>
           <a:prstGeom prst="rect">
             <a:avLst/>
@@ -26793,56 +28933,54 @@
           <a:bodyPr wrap="square" rtlCol="0" anchor="ctr"/>
           <a:lstStyle/>
           <a:p>
+            <a:pPr>
+              <a:lnSpc>
+                <a:spcPct val="125000"/>
+              </a:lnSpc>
+            </a:pPr>
             <a:r>
-              <a:rPr lang="en-NG" sz="1600" dirty="0">
-                <a:solidFill>
-                  <a:srgbClr val="EAF4F4"/>
-                </a:solidFill>
-                <a:latin typeface="Arial" panose="020B0604020202020204" pitchFamily="34" charset="0"/>
-                <a:cs typeface="Arial" panose="020B0604020202020204" pitchFamily="34" charset="0"/>
+              <a:rPr lang="en-NG" b="1" dirty="0">
+                <a:solidFill>
+                  <a:srgbClr val="477BAB"/>
+                </a:solidFill>
               </a:rPr>
-              <a:t>Create targeted retention campaigns for month-to-month customers and encourage migration to one-year or two-year contracts.</a:t>
+              <a:t>Early customer disengagement</a:t>
             </a:r>
-          </a:p>
-          <a:p>
-            <a:endParaRPr lang="en-US" sz="1600" b="1" dirty="0">
+            <a:br>
+              <a:rPr lang="en-NG" dirty="0">
+                <a:solidFill>
+                  <a:srgbClr val="477BAB"/>
+                </a:solidFill>
+              </a:rPr>
+            </a:br>
+            <a:r>
+              <a:rPr lang="en-NG" dirty="0">
+                <a:solidFill>
+                  <a:srgbClr val="477BAB"/>
+                </a:solidFill>
+              </a:rPr>
+              <a:t>Customers who leave early never develop a deeper relationship with the company's services</a:t>
+            </a:r>
+            <a:r>
+              <a:rPr lang="en-NG" dirty="0"/>
+              <a:t>.</a:t>
+            </a:r>
+            <a:endParaRPr lang="en-US" dirty="0">
               <a:solidFill>
-                <a:srgbClr val="EAF4F4"/>
+                <a:srgbClr val="477BAB"/>
               </a:solidFill>
               <a:latin typeface="Arial" panose="020B0604020202020204" pitchFamily="34" charset="0"/>
               <a:cs typeface="Arial" panose="020B0604020202020204" pitchFamily="34" charset="0"/>
             </a:endParaRPr>
           </a:p>
-          <a:p>
-            <a:r>
-              <a:rPr lang="en-NG" sz="1600" b="1" dirty="0">
-                <a:solidFill>
-                  <a:srgbClr val="EAF4F4"/>
-                </a:solidFill>
-                <a:latin typeface="Arial" panose="020B0604020202020204" pitchFamily="34" charset="0"/>
-                <a:cs typeface="Arial" panose="020B0604020202020204" pitchFamily="34" charset="0"/>
-              </a:rPr>
-              <a:t>Why:</a:t>
-            </a:r>
-            <a:r>
-              <a:rPr lang="en-NG" sz="1600" dirty="0">
-                <a:solidFill>
-                  <a:srgbClr val="EAF4F4"/>
-                </a:solidFill>
-                <a:latin typeface="Arial" panose="020B0604020202020204" pitchFamily="34" charset="0"/>
-                <a:cs typeface="Arial" panose="020B0604020202020204" pitchFamily="34" charset="0"/>
-              </a:rPr>
-              <a:t> Month-to-month customers have the highest churn rate by a wide margin.</a:t>
-            </a:r>
-          </a:p>
         </p:txBody>
       </p:sp>
       <p:sp>
         <p:nvSpPr>
-          <p:cNvPr id="27" name="Text 5">
+          <p:cNvPr id="50" name="Text 9">
             <a:extLst>
               <a:ext uri="{FF2B5EF4-FFF2-40B4-BE49-F238E27FC236}">
-                <a16:creationId xmlns:a16="http://schemas.microsoft.com/office/drawing/2014/main" id="{A6B00ECD-CFD2-DD57-ABD9-5BD16FF387AA}"/>
+                <a16:creationId xmlns:a16="http://schemas.microsoft.com/office/drawing/2014/main" id="{8DD16F5A-8309-C615-AD4B-5BC5A1B38FD8}"/>
               </a:ext>
             </a:extLst>
           </p:cNvPr>
@@ -26851,8 +28989,8 @@
         </p:nvSpPr>
         <p:spPr>
           <a:xfrm>
-            <a:off x="4701540" y="2772568"/>
-            <a:ext cx="2788920" cy="2294704"/>
+            <a:off x="352668" y="5247860"/>
+            <a:ext cx="5128591" cy="516836"/>
           </a:xfrm>
           <a:prstGeom prst="rect">
             <a:avLst/>
@@ -26864,83 +29002,50 @@
           <a:bodyPr wrap="square" rtlCol="0" anchor="ctr"/>
           <a:lstStyle/>
           <a:p>
+            <a:pPr>
+              <a:lnSpc>
+                <a:spcPct val="125000"/>
+              </a:lnSpc>
+            </a:pPr>
             <a:r>
-              <a:rPr lang="en-NG" sz="1600" dirty="0">
-                <a:solidFill>
-                  <a:srgbClr val="EAF4F4"/>
-                </a:solidFill>
-                <a:latin typeface="Arial" panose="020B0604020202020204" pitchFamily="34" charset="0"/>
-                <a:cs typeface="Arial" panose="020B0604020202020204" pitchFamily="34" charset="0"/>
+              <a:rPr lang="en-NG" b="1" dirty="0">
+                <a:solidFill>
+                  <a:srgbClr val="477BAB"/>
+                </a:solidFill>
               </a:rPr>
-              <a:t>Review </a:t>
+              <a:t>Reactive, untargeted retention</a:t>
             </a:r>
+            <a:br>
+              <a:rPr lang="en-NG" dirty="0">
+                <a:solidFill>
+                  <a:srgbClr val="477BAB"/>
+                </a:solidFill>
+              </a:rPr>
+            </a:br>
             <a:r>
-              <a:rPr lang="en-NG" sz="1600" dirty="0" err="1">
-                <a:solidFill>
-                  <a:srgbClr val="EAF4F4"/>
-                </a:solidFill>
-                <a:latin typeface="Arial" panose="020B0604020202020204" pitchFamily="34" charset="0"/>
-                <a:cs typeface="Arial" panose="020B0604020202020204" pitchFamily="34" charset="0"/>
+              <a:rPr lang="en-NG" dirty="0">
+                <a:solidFill>
+                  <a:srgbClr val="477BAB"/>
+                </a:solidFill>
               </a:rPr>
-              <a:t>fiber</a:t>
+              <a:t>Without segmentation, retention effort and budget can be spent inefficiently across the wrong customers.</a:t>
             </a:r>
-            <a:r>
-              <a:rPr lang="en-NG" sz="1600" dirty="0">
-                <a:solidFill>
-                  <a:srgbClr val="EAF4F4"/>
-                </a:solidFill>
-                <a:latin typeface="Arial" panose="020B0604020202020204" pitchFamily="34" charset="0"/>
-                <a:cs typeface="Arial" panose="020B0604020202020204" pitchFamily="34" charset="0"/>
-              </a:rPr>
-              <a:t> customers' service quality, pricing, installation experience, complaints, and support interactions.</a:t>
-            </a:r>
-            <a:endParaRPr lang="en-US" sz="1600" dirty="0">
+            <a:endParaRPr lang="en-US" dirty="0">
               <a:solidFill>
-                <a:srgbClr val="EAF4F4"/>
+                <a:srgbClr val="477BAB"/>
               </a:solidFill>
               <a:latin typeface="Arial" panose="020B0604020202020204" pitchFamily="34" charset="0"/>
               <a:cs typeface="Arial" panose="020B0604020202020204" pitchFamily="34" charset="0"/>
             </a:endParaRPr>
           </a:p>
-          <a:p>
-            <a:endParaRPr lang="en-NG" sz="1600" dirty="0">
-              <a:solidFill>
-                <a:srgbClr val="EAF4F4"/>
-              </a:solidFill>
-              <a:latin typeface="Arial" panose="020B0604020202020204" pitchFamily="34" charset="0"/>
-              <a:cs typeface="Arial" panose="020B0604020202020204" pitchFamily="34" charset="0"/>
-            </a:endParaRPr>
-          </a:p>
-          <a:p>
-            <a:r>
-              <a:rPr lang="en-NG" sz="1600" b="1" dirty="0">
-                <a:solidFill>
-                  <a:srgbClr val="EAF4F4"/>
-                </a:solidFill>
-                <a:latin typeface="Arial" panose="020B0604020202020204" pitchFamily="34" charset="0"/>
-                <a:cs typeface="Arial" panose="020B0604020202020204" pitchFamily="34" charset="0"/>
-              </a:rPr>
-              <a:t>Why:</a:t>
-            </a:r>
-            <a:r>
-              <a:rPr lang="en-NG" sz="1600" dirty="0">
-                <a:solidFill>
-                  <a:srgbClr val="EAF4F4"/>
-                </a:solidFill>
-                <a:latin typeface="Arial" panose="020B0604020202020204" pitchFamily="34" charset="0"/>
-                <a:cs typeface="Arial" panose="020B0604020202020204" pitchFamily="34" charset="0"/>
-              </a:rPr>
-              <a:t> Fiber-optic customers have the highest churn rate among internet-service categories.</a:t>
-            </a:r>
-          </a:p>
         </p:txBody>
       </p:sp>
       <p:sp>
         <p:nvSpPr>
-          <p:cNvPr id="29" name="Text 5">
+          <p:cNvPr id="52" name="Text 9">
             <a:extLst>
               <a:ext uri="{FF2B5EF4-FFF2-40B4-BE49-F238E27FC236}">
-                <a16:creationId xmlns:a16="http://schemas.microsoft.com/office/drawing/2014/main" id="{7B76595B-D6EB-8BC4-2690-330F46A1595C}"/>
+                <a16:creationId xmlns:a16="http://schemas.microsoft.com/office/drawing/2014/main" id="{1B44DB7E-6372-A3CC-397F-BE4F1FD862B0}"/>
               </a:ext>
             </a:extLst>
           </p:cNvPr>
@@ -26949,8 +29054,8 @@
         </p:nvSpPr>
         <p:spPr>
           <a:xfrm>
-            <a:off x="2087482" y="1646499"/>
-            <a:ext cx="694945" cy="681290"/>
+            <a:off x="6347149" y="4853439"/>
+            <a:ext cx="5128591" cy="1241646"/>
           </a:xfrm>
           <a:prstGeom prst="rect">
             <a:avLst/>
@@ -26962,17 +29067,51 @@
           <a:bodyPr wrap="square" rtlCol="0" anchor="ctr"/>
           <a:lstStyle/>
           <a:p>
+            <a:pPr>
+              <a:lnSpc>
+                <a:spcPct val="125000"/>
+              </a:lnSpc>
+            </a:pPr>
             <a:r>
-              <a:rPr lang="en-US" sz="2800" b="1" dirty="0">
+              <a:rPr lang="en-NG" b="1" dirty="0">
                 <a:solidFill>
                   <a:srgbClr val="477BAB"/>
                 </a:solidFill>
-                <a:latin typeface="Arial" panose="020B0604020202020204" pitchFamily="34" charset="0"/>
-                <a:cs typeface="Arial" panose="020B0604020202020204" pitchFamily="34" charset="0"/>
               </a:rPr>
-              <a:t>1</a:t>
+              <a:t>Increase meaningful service engagement</a:t>
             </a:r>
-            <a:endParaRPr lang="en-NG" sz="2800" b="1" dirty="0">
+            <a:br>
+              <a:rPr lang="en-NG" dirty="0">
+                <a:solidFill>
+                  <a:srgbClr val="477BAB"/>
+                </a:solidFill>
+              </a:rPr>
+            </a:br>
+            <a:r>
+              <a:rPr lang="en-NG" dirty="0">
+                <a:solidFill>
+                  <a:srgbClr val="477BAB"/>
+                </a:solidFill>
+              </a:rPr>
+              <a:t>Test relevant service bundles, guided by the tenure–Service</a:t>
+            </a:r>
+            <a:r>
+              <a:rPr lang="en-US" dirty="0">
+                <a:solidFill>
+                  <a:srgbClr val="477BAB"/>
+                </a:solidFill>
+              </a:rPr>
+              <a:t> </a:t>
+            </a:r>
+            <a:r>
+              <a:rPr lang="en-NG" dirty="0">
+                <a:solidFill>
+                  <a:srgbClr val="477BAB"/>
+                </a:solidFill>
+              </a:rPr>
+              <a:t>Count relationship.</a:t>
+            </a:r>
+            <a:endParaRPr lang="en-US" dirty="0">
               <a:solidFill>
                 <a:srgbClr val="477BAB"/>
               </a:solidFill>
@@ -26984,10 +29123,10 @@
       </p:sp>
       <p:sp>
         <p:nvSpPr>
-          <p:cNvPr id="31" name="Text 5">
+          <p:cNvPr id="54" name="Text 9">
             <a:extLst>
               <a:ext uri="{FF2B5EF4-FFF2-40B4-BE49-F238E27FC236}">
-                <a16:creationId xmlns:a16="http://schemas.microsoft.com/office/drawing/2014/main" id="{DC705E24-ECC5-0957-EA6E-EDE36F4C8989}"/>
+                <a16:creationId xmlns:a16="http://schemas.microsoft.com/office/drawing/2014/main" id="{743FFBB8-C7D0-5873-E472-C5759C133471}"/>
               </a:ext>
             </a:extLst>
           </p:cNvPr>
@@ -26996,8 +29135,8 @@
         </p:nvSpPr>
         <p:spPr>
           <a:xfrm>
-            <a:off x="5987066" y="1695299"/>
-            <a:ext cx="694945" cy="681290"/>
+            <a:off x="6432438" y="1829376"/>
+            <a:ext cx="5128591" cy="1241646"/>
           </a:xfrm>
           <a:prstGeom prst="rect">
             <a:avLst/>
@@ -27009,17 +29148,35 @@
           <a:bodyPr wrap="square" rtlCol="0" anchor="ctr"/>
           <a:lstStyle/>
           <a:p>
+            <a:pPr>
+              <a:lnSpc>
+                <a:spcPct val="125000"/>
+              </a:lnSpc>
+            </a:pPr>
             <a:r>
-              <a:rPr lang="en-US" sz="2800" b="1" dirty="0">
+              <a:rPr lang="en-NG" b="1" dirty="0">
                 <a:solidFill>
                   <a:srgbClr val="477BAB"/>
                 </a:solidFill>
-                <a:latin typeface="Arial" panose="020B0604020202020204" pitchFamily="34" charset="0"/>
-                <a:cs typeface="Arial" panose="020B0604020202020204" pitchFamily="34" charset="0"/>
               </a:rPr>
-              <a:t>2</a:t>
+              <a:t>Convert high-risk customers to longer contracts</a:t>
             </a:r>
-            <a:endParaRPr lang="en-NG" sz="2800" b="1" dirty="0">
+            <a:br>
+              <a:rPr lang="en-NG" dirty="0">
+                <a:solidFill>
+                  <a:srgbClr val="477BAB"/>
+                </a:solidFill>
+              </a:rPr>
+            </a:br>
+            <a:r>
+              <a:rPr lang="en-NG" dirty="0">
+                <a:solidFill>
+                  <a:srgbClr val="477BAB"/>
+                </a:solidFill>
+              </a:rPr>
+              <a:t>Month-to-month customers are a clear target for contract-conversion campaigns.</a:t>
+            </a:r>
+            <a:endParaRPr lang="en-US" dirty="0">
               <a:solidFill>
                 <a:srgbClr val="477BAB"/>
               </a:solidFill>
@@ -27031,10 +29188,10 @@
       </p:sp>
       <p:sp>
         <p:nvSpPr>
-          <p:cNvPr id="33" name="Text 5">
+          <p:cNvPr id="56" name="Text 9">
             <a:extLst>
               <a:ext uri="{FF2B5EF4-FFF2-40B4-BE49-F238E27FC236}">
-                <a16:creationId xmlns:a16="http://schemas.microsoft.com/office/drawing/2014/main" id="{1D2F3245-6274-FD17-B37D-E47E5BF6CF8F}"/>
+                <a16:creationId xmlns:a16="http://schemas.microsoft.com/office/drawing/2014/main" id="{1EEC4307-E1CE-C432-6C81-3E5AF22C8125}"/>
               </a:ext>
             </a:extLst>
           </p:cNvPr>
@@ -27043,8 +29200,8 @@
         </p:nvSpPr>
         <p:spPr>
           <a:xfrm>
-            <a:off x="9886650" y="1670899"/>
-            <a:ext cx="694945" cy="681290"/>
+            <a:off x="6321286" y="3352800"/>
+            <a:ext cx="5128591" cy="1241646"/>
           </a:xfrm>
           <a:prstGeom prst="rect">
             <a:avLst/>
@@ -27056,17 +29213,35 @@
           <a:bodyPr wrap="square" rtlCol="0" anchor="ctr"/>
           <a:lstStyle/>
           <a:p>
+            <a:pPr>
+              <a:lnSpc>
+                <a:spcPct val="125000"/>
+              </a:lnSpc>
+            </a:pPr>
             <a:r>
-              <a:rPr lang="en-US" sz="2800" b="1" dirty="0">
+              <a:rPr lang="en-NG" b="1" dirty="0">
                 <a:solidFill>
                   <a:srgbClr val="477BAB"/>
                 </a:solidFill>
-                <a:latin typeface="Arial" panose="020B0604020202020204" pitchFamily="34" charset="0"/>
-                <a:cs typeface="Arial" panose="020B0604020202020204" pitchFamily="34" charset="0"/>
               </a:rPr>
-              <a:t>3</a:t>
+              <a:t>Strengthen early-tenure engagement</a:t>
             </a:r>
-            <a:endParaRPr lang="en-NG" sz="2800" b="1" dirty="0">
+            <a:br>
+              <a:rPr lang="en-NG" dirty="0">
+                <a:solidFill>
+                  <a:srgbClr val="477BAB"/>
+                </a:solidFill>
+              </a:rPr>
+            </a:br>
+            <a:r>
+              <a:rPr lang="en-NG" dirty="0">
+                <a:solidFill>
+                  <a:srgbClr val="477BAB"/>
+                </a:solidFill>
+              </a:rPr>
+              <a:t>Structured onboarding can build engagement before customers become churn candidates.</a:t>
+            </a:r>
+            <a:endParaRPr lang="en-US" dirty="0">
               <a:solidFill>
                 <a:srgbClr val="477BAB"/>
               </a:solidFill>
@@ -27076,88 +29251,10 @@
           </a:p>
         </p:txBody>
       </p:sp>
-      <p:sp>
-        <p:nvSpPr>
-          <p:cNvPr id="35" name="Text 5">
-            <a:extLst>
-              <a:ext uri="{FF2B5EF4-FFF2-40B4-BE49-F238E27FC236}">
-                <a16:creationId xmlns:a16="http://schemas.microsoft.com/office/drawing/2014/main" id="{76300BAD-941C-AC24-24E4-A4F7703BCD45}"/>
-              </a:ext>
-            </a:extLst>
-          </p:cNvPr>
-          <p:cNvSpPr/>
-          <p:nvPr/>
-        </p:nvSpPr>
-        <p:spPr>
-          <a:xfrm>
-            <a:off x="8577469" y="2653096"/>
-            <a:ext cx="2788920" cy="2534005"/>
-          </a:xfrm>
-          <a:prstGeom prst="rect">
-            <a:avLst/>
-          </a:prstGeom>
-          <a:noFill/>
-          <a:ln/>
-        </p:spPr>
-        <p:txBody>
-          <a:bodyPr wrap="square" rtlCol="0" anchor="ctr"/>
-          <a:lstStyle/>
-          <a:p>
-            <a:r>
-              <a:rPr lang="en-NG" sz="1600" dirty="0">
-                <a:solidFill>
-                  <a:srgbClr val="EAF4F4"/>
-                </a:solidFill>
-                <a:latin typeface="Arial" panose="020B0604020202020204" pitchFamily="34" charset="0"/>
-                <a:cs typeface="Arial" panose="020B0604020202020204" pitchFamily="34" charset="0"/>
-              </a:rPr>
-              <a:t>Provide incentives for customers to remain longer, such as loyalty benefits, contract upgrades, bundled services, or preferential offers.</a:t>
-            </a:r>
-            <a:endParaRPr lang="en-US" sz="1600" dirty="0">
-              <a:solidFill>
-                <a:srgbClr val="EAF4F4"/>
-              </a:solidFill>
-              <a:latin typeface="Arial" panose="020B0604020202020204" pitchFamily="34" charset="0"/>
-              <a:cs typeface="Arial" panose="020B0604020202020204" pitchFamily="34" charset="0"/>
-            </a:endParaRPr>
-          </a:p>
-          <a:p>
-            <a:endParaRPr lang="en-NG" sz="1600" dirty="0">
-              <a:solidFill>
-                <a:srgbClr val="EAF4F4"/>
-              </a:solidFill>
-              <a:latin typeface="Arial" panose="020B0604020202020204" pitchFamily="34" charset="0"/>
-              <a:cs typeface="Arial" panose="020B0604020202020204" pitchFamily="34" charset="0"/>
-            </a:endParaRPr>
-          </a:p>
-          <a:p>
-            <a:r>
-              <a:rPr lang="en-NG" sz="1600" b="1" dirty="0">
-                <a:solidFill>
-                  <a:srgbClr val="EAF4F4"/>
-                </a:solidFill>
-                <a:latin typeface="Arial" panose="020B0604020202020204" pitchFamily="34" charset="0"/>
-                <a:cs typeface="Arial" panose="020B0604020202020204" pitchFamily="34" charset="0"/>
-              </a:rPr>
-              <a:t>Focus especially on:</a:t>
-            </a:r>
-            <a:r>
-              <a:rPr lang="en-NG" sz="1600" dirty="0">
-                <a:solidFill>
-                  <a:srgbClr val="EAF4F4"/>
-                </a:solidFill>
-                <a:latin typeface="Arial" panose="020B0604020202020204" pitchFamily="34" charset="0"/>
-                <a:cs typeface="Arial" panose="020B0604020202020204" pitchFamily="34" charset="0"/>
-              </a:rPr>
-              <a:t> month-to-month and higher-risk customers.</a:t>
-            </a:r>
-          </a:p>
-        </p:txBody>
-      </p:sp>
     </p:spTree>
     <p:extLst>
       <p:ext uri="{BB962C8B-B14F-4D97-AF65-F5344CB8AC3E}">
-        <p14:creationId xmlns:p14="http://schemas.microsoft.com/office/powerpoint/2010/main" val="1870950161"/>
+        <p14:creationId xmlns:p14="http://schemas.microsoft.com/office/powerpoint/2010/main" val="361786448"/>
       </p:ext>
     </p:extLst>
   </p:cSld>
